--- a/Fase 3/Evidencias Grupales/Presentación Proyecto.pptx
+++ b/Fase 3/Evidencias Grupales/Presentación Proyecto.pptx
@@ -1926,7 +1926,7 @@
           <a:p>
             <a:fld id="{48A87A34-81AB-432B-8DAE-1953F412C126}" type="datetimeFigureOut">
               <a:rPr lang="en-US" smtClean="0"/>
-              <a:t>11/6/2025</a:t>
+              <a:t>11/10/2025</a:t>
             </a:fld>
             <a:endParaRPr lang="en-US" dirty="0"/>
           </a:p>
@@ -2138,7 +2138,7 @@
           <a:p>
             <a:fld id="{48A87A34-81AB-432B-8DAE-1953F412C126}" type="datetimeFigureOut">
               <a:rPr lang="en-US" smtClean="0"/>
-              <a:t>11/6/2025</a:t>
+              <a:t>11/10/2025</a:t>
             </a:fld>
             <a:endParaRPr lang="en-US" dirty="0"/>
           </a:p>
@@ -2354,7 +2354,7 @@
           <a:p>
             <a:fld id="{48A87A34-81AB-432B-8DAE-1953F412C126}" type="datetimeFigureOut">
               <a:rPr lang="en-US" smtClean="0"/>
-              <a:t>11/6/2025</a:t>
+              <a:t>11/10/2025</a:t>
             </a:fld>
             <a:endParaRPr lang="en-US" dirty="0"/>
           </a:p>
@@ -2796,7 +2796,7 @@
           <a:p>
             <a:fld id="{48A87A34-81AB-432B-8DAE-1953F412C126}" type="datetimeFigureOut">
               <a:rPr lang="en-US" smtClean="0"/>
-              <a:t>11/6/2025</a:t>
+              <a:t>11/10/2025</a:t>
             </a:fld>
             <a:endParaRPr lang="en-US" dirty="0"/>
           </a:p>
@@ -3106,7 +3106,7 @@
           <a:p>
             <a:fld id="{48A87A34-81AB-432B-8DAE-1953F412C126}" type="datetimeFigureOut">
               <a:rPr lang="en-US" smtClean="0"/>
-              <a:t>11/6/2025</a:t>
+              <a:t>11/10/2025</a:t>
             </a:fld>
             <a:endParaRPr lang="en-US" dirty="0"/>
           </a:p>
@@ -3375,7 +3375,7 @@
           <a:p>
             <a:fld id="{48A87A34-81AB-432B-8DAE-1953F412C126}" type="datetimeFigureOut">
               <a:rPr lang="en-US" smtClean="0"/>
-              <a:t>11/6/2025</a:t>
+              <a:t>11/10/2025</a:t>
             </a:fld>
             <a:endParaRPr lang="en-US" dirty="0"/>
           </a:p>
@@ -3792,7 +3792,7 @@
           <a:p>
             <a:fld id="{48A87A34-81AB-432B-8DAE-1953F412C126}" type="datetimeFigureOut">
               <a:rPr lang="en-US" smtClean="0"/>
-              <a:t>11/6/2025</a:t>
+              <a:t>11/10/2025</a:t>
             </a:fld>
             <a:endParaRPr lang="en-US" dirty="0"/>
           </a:p>
@@ -3942,7 +3942,7 @@
           <a:p>
             <a:fld id="{48A87A34-81AB-432B-8DAE-1953F412C126}" type="datetimeFigureOut">
               <a:rPr lang="en-US" smtClean="0"/>
-              <a:t>11/6/2025</a:t>
+              <a:t>11/10/2025</a:t>
             </a:fld>
             <a:endParaRPr lang="en-US" dirty="0"/>
           </a:p>
@@ -4069,7 +4069,7 @@
           <a:p>
             <a:fld id="{48A87A34-81AB-432B-8DAE-1953F412C126}" type="datetimeFigureOut">
               <a:rPr lang="en-US" smtClean="0"/>
-              <a:t>11/6/2025</a:t>
+              <a:t>11/10/2025</a:t>
             </a:fld>
             <a:endParaRPr lang="en-US" dirty="0"/>
           </a:p>
@@ -4321,7 +4321,7 @@
           <a:p>
             <a:fld id="{48A87A34-81AB-432B-8DAE-1953F412C126}" type="datetimeFigureOut">
               <a:rPr lang="en-US" smtClean="0"/>
-              <a:t>11/6/2025</a:t>
+              <a:t>11/10/2025</a:t>
             </a:fld>
             <a:endParaRPr lang="en-US" dirty="0"/>
           </a:p>
@@ -4782,7 +4782,7 @@
             <a:fld id="{48A87A34-81AB-432B-8DAE-1953F412C126}" type="datetimeFigureOut">
               <a:rPr lang="en-US" smtClean="0"/>
               <a:pPr/>
-              <a:t>11/6/2025</a:t>
+              <a:t>11/10/2025</a:t>
             </a:fld>
             <a:endParaRPr lang="en-US" dirty="0"/>
           </a:p>
@@ -5118,7 +5118,7 @@
             <a:fld id="{48A87A34-81AB-432B-8DAE-1953F412C126}" type="datetimeFigureOut">
               <a:rPr lang="en-US" smtClean="0"/>
               <a:pPr/>
-              <a:t>11/6/2025</a:t>
+              <a:t>11/10/2025</a:t>
             </a:fld>
             <a:endParaRPr lang="en-US" dirty="0"/>
           </a:p>
@@ -8662,7 +8662,7 @@
         <p:spPr>
           <a:xfrm>
             <a:off x="5935579" y="4360905"/>
-            <a:ext cx="7323220" cy="2191947"/>
+            <a:ext cx="7323220" cy="1764907"/>
           </a:xfrm>
           <a:prstGeom prst="rect">
             <a:avLst/>
@@ -8707,7 +8707,7 @@
                 </a:solidFill>
                 <a:latin typeface="Source Sans 3" pitchFamily="34" charset="0"/>
               </a:rPr>
-              <a:t>.Acortar el tiempo desde la solicitud hasta la atención.</a:t>
+              <a:t>Acortar el tiempo desde la solicitud hasta la atención</a:t>
             </a:r>
           </a:p>
           <a:p>
@@ -8725,7 +8725,7 @@
                 </a:solidFill>
                 <a:latin typeface="Source Sans 3" pitchFamily="34" charset="0"/>
               </a:rPr>
-              <a:t>Reducir ausencias (no-show)</a:t>
+              <a:t>Aumentar la satisfacción del paciente</a:t>
             </a:r>
           </a:p>
           <a:p>
@@ -8743,25 +8743,7 @@
                 </a:solidFill>
                 <a:latin typeface="Source Sans 3" pitchFamily="34" charset="0"/>
               </a:rPr>
-              <a:t>Aumentar la satisfacción del paciente</a:t>
-            </a:r>
-          </a:p>
-          <a:p>
-            <a:pPr marL="285750" indent="-285750">
-              <a:lnSpc>
-                <a:spcPct val="150000"/>
-              </a:lnSpc>
-              <a:buFont typeface="Arial" panose="020B0604020202020204" pitchFamily="34" charset="0"/>
-              <a:buChar char="•"/>
-            </a:pPr>
-            <a:r>
-              <a:rPr lang="es-419" sz="1850" dirty="0">
-                <a:solidFill>
-                  <a:srgbClr val="272525"/>
-                </a:solidFill>
-                <a:latin typeface="Source Sans 3" pitchFamily="34" charset="0"/>
-              </a:rPr>
-              <a:t>Bajar la carga operativa del equipo.</a:t>
+              <a:t>Bajar la carga operativa del equipo</a:t>
             </a:r>
           </a:p>
         </p:txBody>
@@ -8944,7 +8926,7 @@
         <p:spPr>
           <a:xfrm>
             <a:off x="1684565" y="1199842"/>
-            <a:ext cx="9972517" cy="5132174"/>
+            <a:ext cx="9972517" cy="4670509"/>
           </a:xfrm>
           <a:prstGeom prst="rect">
             <a:avLst/>
@@ -8971,7 +8953,7 @@
                 </a:solidFill>
                 <a:latin typeface="Source Sans 3" pitchFamily="34" charset="0"/>
               </a:rPr>
-              <a:t>Obtención orientación inicial que sugiere especialidad y nivel de urgencia antes de reservar.</a:t>
+              <a:t>Mejorar la orientación inicial que sugiere especialidad y nivel de urgencia antes de reservar a través de IA .</a:t>
             </a:r>
           </a:p>
           <a:p>
@@ -8989,25 +8971,7 @@
                 </a:solidFill>
                 <a:latin typeface="Source Sans 3" pitchFamily="34" charset="0"/>
               </a:rPr>
-              <a:t>Menor tiempo a la cita: reserva en un paso con horarios visibles y opción de próxima atención disponible.</a:t>
-            </a:r>
-          </a:p>
-          <a:p>
-            <a:pPr marL="285750" indent="-285750">
-              <a:lnSpc>
-                <a:spcPct val="150000"/>
-              </a:lnSpc>
-              <a:buFont typeface="Arial" panose="020B0604020202020204" pitchFamily="34" charset="0"/>
-              <a:buChar char="•"/>
-            </a:pPr>
-            <a:r>
-              <a:rPr lang="es-419" sz="2000" dirty="0">
-                <a:solidFill>
-                  <a:srgbClr val="272525"/>
-                </a:solidFill>
-                <a:latin typeface="Source Sans 3" pitchFamily="34" charset="0"/>
-              </a:rPr>
-              <a:t>Menos ausencias: confirmaciones y recordatorios previos a la cita.</a:t>
+              <a:t>Mejorar los tiempo en web para reservar con horarios visibles y opción de próxima atención disponible.</a:t>
             </a:r>
           </a:p>
           <a:p>

--- a/Fase 3/Evidencias Grupales/Presentación Proyecto.pptx
+++ b/Fase 3/Evidencias Grupales/Presentación Proyecto.pptx
@@ -5,7 +5,7 @@
     <p:sldMasterId id="2147483726" r:id="rId1"/>
   </p:sldMasterIdLst>
   <p:notesMasterIdLst>
-    <p:notesMasterId r:id="rId17"/>
+    <p:notesMasterId r:id="rId18"/>
   </p:notesMasterIdLst>
   <p:sldIdLst>
     <p:sldId id="256" r:id="rId2"/>
@@ -19,35 +19,36 @@
     <p:sldId id="264" r:id="rId10"/>
     <p:sldId id="278" r:id="rId11"/>
     <p:sldId id="270" r:id="rId12"/>
-    <p:sldId id="280" r:id="rId13"/>
-    <p:sldId id="282" r:id="rId14"/>
-    <p:sldId id="269" r:id="rId15"/>
-    <p:sldId id="274" r:id="rId16"/>
+    <p:sldId id="283" r:id="rId13"/>
+    <p:sldId id="280" r:id="rId14"/>
+    <p:sldId id="282" r:id="rId15"/>
+    <p:sldId id="269" r:id="rId16"/>
+    <p:sldId id="274" r:id="rId17"/>
   </p:sldIdLst>
   <p:sldSz cx="14630400" cy="8229600"/>
   <p:notesSz cx="8229600" cy="14630400"/>
   <p:embeddedFontLst>
     <p:embeddedFont>
       <p:font typeface="Aptos Narrow" panose="020B0004020202020204" pitchFamily="34" charset="0"/>
-      <p:regular r:id="rId18"/>
-      <p:bold r:id="rId19"/>
-      <p:italic r:id="rId20"/>
-      <p:boldItalic r:id="rId21"/>
+      <p:regular r:id="rId19"/>
+      <p:bold r:id="rId20"/>
+      <p:italic r:id="rId21"/>
+      <p:boldItalic r:id="rId22"/>
     </p:embeddedFont>
     <p:embeddedFont>
       <p:font typeface="Gill Sans MT" panose="020B0502020104020203" pitchFamily="34" charset="0"/>
-      <p:regular r:id="rId22"/>
-      <p:bold r:id="rId23"/>
-      <p:italic r:id="rId24"/>
-      <p:boldItalic r:id="rId25"/>
+      <p:regular r:id="rId23"/>
+      <p:bold r:id="rId24"/>
+      <p:italic r:id="rId25"/>
+      <p:boldItalic r:id="rId26"/>
     </p:embeddedFont>
     <p:embeddedFont>
       <p:font typeface="Source Sans 3" panose="020B0604020202020204" charset="0"/>
-      <p:regular r:id="rId26"/>
+      <p:regular r:id="rId27"/>
     </p:embeddedFont>
     <p:embeddedFont>
       <p:font typeface="Source Serif 4 Semi Bold" panose="020B0604020202020204" charset="0"/>
-      <p:regular r:id="rId27"/>
+      <p:regular r:id="rId28"/>
     </p:embeddedFont>
   </p:embeddedFontLst>
   <p:defaultTextStyle>
@@ -695,7 +696,7 @@
           <a:p>
             <a:fld id="{F7021451-1387-4CA6-816F-3879F97B5CBC}" type="slidenum">
               <a:rPr lang="en-US"/>
-              <a:t>12</a:t>
+              <a:t>13</a:t>
             </a:fld>
             <a:endParaRPr lang="en-US"/>
           </a:p>
@@ -810,7 +811,7 @@
           <a:p>
             <a:fld id="{F7021451-1387-4CA6-816F-3879F97B5CBC}" type="slidenum">
               <a:rPr lang="en-US"/>
-              <a:t>13</a:t>
+              <a:t>14</a:t>
             </a:fld>
             <a:endParaRPr lang="en-US"/>
           </a:p>
@@ -925,7 +926,7 @@
           <a:p>
             <a:fld id="{F7021451-1387-4CA6-816F-3879F97B5CBC}" type="slidenum">
               <a:rPr lang="en-US"/>
-              <a:t>14</a:t>
+              <a:t>15</a:t>
             </a:fld>
             <a:endParaRPr lang="en-US"/>
           </a:p>
@@ -1040,7 +1041,7 @@
           <a:p>
             <a:fld id="{F7021451-1387-4CA6-816F-3879F97B5CBC}" type="slidenum">
               <a:rPr lang="en-US"/>
-              <a:t>15</a:t>
+              <a:t>16</a:t>
             </a:fld>
             <a:endParaRPr lang="en-US"/>
           </a:p>
@@ -1926,7 +1927,7 @@
           <a:p>
             <a:fld id="{48A87A34-81AB-432B-8DAE-1953F412C126}" type="datetimeFigureOut">
               <a:rPr lang="en-US" smtClean="0"/>
-              <a:t>11/10/2025</a:t>
+              <a:t>11/25/2025</a:t>
             </a:fld>
             <a:endParaRPr lang="en-US" dirty="0"/>
           </a:p>
@@ -2138,7 +2139,7 @@
           <a:p>
             <a:fld id="{48A87A34-81AB-432B-8DAE-1953F412C126}" type="datetimeFigureOut">
               <a:rPr lang="en-US" smtClean="0"/>
-              <a:t>11/10/2025</a:t>
+              <a:t>11/25/2025</a:t>
             </a:fld>
             <a:endParaRPr lang="en-US" dirty="0"/>
           </a:p>
@@ -2354,7 +2355,7 @@
           <a:p>
             <a:fld id="{48A87A34-81AB-432B-8DAE-1953F412C126}" type="datetimeFigureOut">
               <a:rPr lang="en-US" smtClean="0"/>
-              <a:t>11/10/2025</a:t>
+              <a:t>11/25/2025</a:t>
             </a:fld>
             <a:endParaRPr lang="en-US" dirty="0"/>
           </a:p>
@@ -2796,7 +2797,7 @@
           <a:p>
             <a:fld id="{48A87A34-81AB-432B-8DAE-1953F412C126}" type="datetimeFigureOut">
               <a:rPr lang="en-US" smtClean="0"/>
-              <a:t>11/10/2025</a:t>
+              <a:t>11/25/2025</a:t>
             </a:fld>
             <a:endParaRPr lang="en-US" dirty="0"/>
           </a:p>
@@ -3106,7 +3107,7 @@
           <a:p>
             <a:fld id="{48A87A34-81AB-432B-8DAE-1953F412C126}" type="datetimeFigureOut">
               <a:rPr lang="en-US" smtClean="0"/>
-              <a:t>11/10/2025</a:t>
+              <a:t>11/25/2025</a:t>
             </a:fld>
             <a:endParaRPr lang="en-US" dirty="0"/>
           </a:p>
@@ -3375,7 +3376,7 @@
           <a:p>
             <a:fld id="{48A87A34-81AB-432B-8DAE-1953F412C126}" type="datetimeFigureOut">
               <a:rPr lang="en-US" smtClean="0"/>
-              <a:t>11/10/2025</a:t>
+              <a:t>11/25/2025</a:t>
             </a:fld>
             <a:endParaRPr lang="en-US" dirty="0"/>
           </a:p>
@@ -3792,7 +3793,7 @@
           <a:p>
             <a:fld id="{48A87A34-81AB-432B-8DAE-1953F412C126}" type="datetimeFigureOut">
               <a:rPr lang="en-US" smtClean="0"/>
-              <a:t>11/10/2025</a:t>
+              <a:t>11/25/2025</a:t>
             </a:fld>
             <a:endParaRPr lang="en-US" dirty="0"/>
           </a:p>
@@ -3942,7 +3943,7 @@
           <a:p>
             <a:fld id="{48A87A34-81AB-432B-8DAE-1953F412C126}" type="datetimeFigureOut">
               <a:rPr lang="en-US" smtClean="0"/>
-              <a:t>11/10/2025</a:t>
+              <a:t>11/25/2025</a:t>
             </a:fld>
             <a:endParaRPr lang="en-US" dirty="0"/>
           </a:p>
@@ -4069,7 +4070,7 @@
           <a:p>
             <a:fld id="{48A87A34-81AB-432B-8DAE-1953F412C126}" type="datetimeFigureOut">
               <a:rPr lang="en-US" smtClean="0"/>
-              <a:t>11/10/2025</a:t>
+              <a:t>11/25/2025</a:t>
             </a:fld>
             <a:endParaRPr lang="en-US" dirty="0"/>
           </a:p>
@@ -4321,7 +4322,7 @@
           <a:p>
             <a:fld id="{48A87A34-81AB-432B-8DAE-1953F412C126}" type="datetimeFigureOut">
               <a:rPr lang="en-US" smtClean="0"/>
-              <a:t>11/10/2025</a:t>
+              <a:t>11/25/2025</a:t>
             </a:fld>
             <a:endParaRPr lang="en-US" dirty="0"/>
           </a:p>
@@ -4782,7 +4783,7 @@
             <a:fld id="{48A87A34-81AB-432B-8DAE-1953F412C126}" type="datetimeFigureOut">
               <a:rPr lang="en-US" smtClean="0"/>
               <a:pPr/>
-              <a:t>11/10/2025</a:t>
+              <a:t>11/25/2025</a:t>
             </a:fld>
             <a:endParaRPr lang="en-US" dirty="0"/>
           </a:p>
@@ -5118,7 +5119,7 @@
             <a:fld id="{48A87A34-81AB-432B-8DAE-1953F412C126}" type="datetimeFigureOut">
               <a:rPr lang="en-US" smtClean="0"/>
               <a:pPr/>
-              <a:t>11/10/2025</a:t>
+              <a:t>11/25/2025</a:t>
             </a:fld>
             <a:endParaRPr lang="en-US" dirty="0"/>
           </a:p>
@@ -6237,6 +6238,342 @@
   <p:cSld>
     <p:spTree>
       <p:nvGrpSpPr>
+        <p:cNvPr id="1" name=""/>
+        <p:cNvGrpSpPr/>
+        <p:nvPr/>
+      </p:nvGrpSpPr>
+      <p:grpSpPr>
+        <a:xfrm>
+          <a:off x="0" y="0"/>
+          <a:ext cx="0" cy="0"/>
+          <a:chOff x="0" y="0"/>
+          <a:chExt cx="0" cy="0"/>
+        </a:xfrm>
+      </p:grpSpPr>
+      <p:sp>
+        <p:nvSpPr>
+          <p:cNvPr id="3" name="CuadroTexto 2">
+            <a:extLst>
+              <a:ext uri="{FF2B5EF4-FFF2-40B4-BE49-F238E27FC236}">
+                <a16:creationId xmlns:a16="http://schemas.microsoft.com/office/drawing/2014/main" id="{2907C501-E297-57A4-B465-4FE9C7D60002}"/>
+              </a:ext>
+            </a:extLst>
+          </p:cNvPr>
+          <p:cNvSpPr txBox="1"/>
+          <p:nvPr/>
+        </p:nvSpPr>
+        <p:spPr>
+          <a:xfrm>
+            <a:off x="956009" y="1698754"/>
+            <a:ext cx="7117785" cy="4832092"/>
+          </a:xfrm>
+          <a:prstGeom prst="rect">
+            <a:avLst/>
+          </a:prstGeom>
+          <a:noFill/>
+        </p:spPr>
+        <p:txBody>
+          <a:bodyPr wrap="square">
+            <a:spAutoFit/>
+          </a:bodyPr>
+          <a:lstStyle/>
+          <a:p>
+            <a:r>
+              <a:rPr lang="es-419" sz="2800" dirty="0">
+                <a:solidFill>
+                  <a:srgbClr val="272525"/>
+                </a:solidFill>
+                <a:latin typeface="Source Serif 4 Semi Bold" pitchFamily="34" charset="0"/>
+                <a:ea typeface="Source Serif 4 Semi Bold" pitchFamily="34" charset="-122"/>
+              </a:rPr>
+              <a:t>“En Chile ya existen soluciones con IA para orientación </a:t>
+            </a:r>
+            <a:r>
+              <a:rPr lang="es-419" sz="2400" dirty="0">
+                <a:solidFill>
+                  <a:srgbClr val="272525"/>
+                </a:solidFill>
+                <a:latin typeface="Source Serif 4 Semi Bold" pitchFamily="34" charset="0"/>
+                <a:ea typeface="Source Serif 4 Semi Bold" pitchFamily="34" charset="-122"/>
+              </a:rPr>
+              <a:t>médica</a:t>
+            </a:r>
+            <a:r>
+              <a:rPr lang="es-419" sz="2800" dirty="0">
+                <a:solidFill>
+                  <a:srgbClr val="272525"/>
+                </a:solidFill>
+                <a:latin typeface="Source Serif 4 Semi Bold" pitchFamily="34" charset="0"/>
+                <a:ea typeface="Source Serif 4 Semi Bold" pitchFamily="34" charset="-122"/>
+              </a:rPr>
+              <a:t> y </a:t>
+            </a:r>
+            <a:r>
+              <a:rPr lang="es-419" sz="2800" dirty="0" err="1">
+                <a:solidFill>
+                  <a:srgbClr val="272525"/>
+                </a:solidFill>
+                <a:latin typeface="Source Serif 4 Semi Bold" pitchFamily="34" charset="0"/>
+                <a:ea typeface="Source Serif 4 Semi Bold" pitchFamily="34" charset="-122"/>
+              </a:rPr>
+              <a:t>triage</a:t>
+            </a:r>
+            <a:r>
+              <a:rPr lang="es-419" sz="2800" dirty="0">
+                <a:solidFill>
+                  <a:srgbClr val="272525"/>
+                </a:solidFill>
+                <a:latin typeface="Source Serif 4 Semi Bold" pitchFamily="34" charset="0"/>
+                <a:ea typeface="Source Serif 4 Semi Bold" pitchFamily="34" charset="-122"/>
+              </a:rPr>
+              <a:t> (como </a:t>
+            </a:r>
+            <a:r>
+              <a:rPr lang="es-419" sz="2800" dirty="0" err="1">
+                <a:solidFill>
+                  <a:srgbClr val="272525"/>
+                </a:solidFill>
+                <a:latin typeface="Source Serif 4 Semi Bold" pitchFamily="34" charset="0"/>
+                <a:ea typeface="Source Serif 4 Semi Bold" pitchFamily="34" charset="-122"/>
+              </a:rPr>
+              <a:t>Mediko</a:t>
+            </a:r>
+            <a:r>
+              <a:rPr lang="es-419" sz="2800" dirty="0">
+                <a:solidFill>
+                  <a:srgbClr val="272525"/>
+                </a:solidFill>
+                <a:latin typeface="Source Serif 4 Semi Bold" pitchFamily="34" charset="0"/>
+                <a:ea typeface="Source Serif 4 Semi Bold" pitchFamily="34" charset="-122"/>
+              </a:rPr>
+              <a:t> y </a:t>
+            </a:r>
+            <a:r>
+              <a:rPr lang="es-419" sz="2800" dirty="0" err="1">
+                <a:solidFill>
+                  <a:srgbClr val="272525"/>
+                </a:solidFill>
+                <a:latin typeface="Source Serif 4 Semi Bold" pitchFamily="34" charset="0"/>
+                <a:ea typeface="Source Serif 4 Semi Bold" pitchFamily="34" charset="-122"/>
+              </a:rPr>
+              <a:t>SmartTriage</a:t>
+            </a:r>
+            <a:r>
+              <a:rPr lang="es-419" sz="2800" dirty="0">
+                <a:solidFill>
+                  <a:srgbClr val="272525"/>
+                </a:solidFill>
+                <a:latin typeface="Source Serif 4 Semi Bold" pitchFamily="34" charset="0"/>
+                <a:ea typeface="Source Serif 4 Semi Bold" pitchFamily="34" charset="-122"/>
+              </a:rPr>
+              <a:t> en el Hospital de Quintero), pero están enfocadas en orientación general o urgencias. </a:t>
+            </a:r>
+            <a:r>
+              <a:rPr lang="es-419" sz="2800" dirty="0" err="1">
+                <a:solidFill>
+                  <a:srgbClr val="272525"/>
+                </a:solidFill>
+                <a:latin typeface="Source Serif 4 Semi Bold" pitchFamily="34" charset="0"/>
+                <a:ea typeface="Source Serif 4 Semi Bold" pitchFamily="34" charset="-122"/>
+              </a:rPr>
+              <a:t>MediTriage</a:t>
+            </a:r>
+            <a:r>
+              <a:rPr lang="es-419" sz="2800" dirty="0">
+                <a:solidFill>
+                  <a:srgbClr val="272525"/>
+                </a:solidFill>
+                <a:latin typeface="Source Serif 4 Semi Bold" pitchFamily="34" charset="0"/>
+                <a:ea typeface="Source Serif 4 Semi Bold" pitchFamily="34" charset="-122"/>
+              </a:rPr>
+              <a:t> lleva ese enfoque de </a:t>
+            </a:r>
+            <a:r>
+              <a:rPr lang="es-419" sz="2800" dirty="0" err="1">
+                <a:solidFill>
+                  <a:srgbClr val="272525"/>
+                </a:solidFill>
+                <a:latin typeface="Source Serif 4 Semi Bold" pitchFamily="34" charset="0"/>
+                <a:ea typeface="Source Serif 4 Semi Bold" pitchFamily="34" charset="-122"/>
+              </a:rPr>
+              <a:t>triage</a:t>
+            </a:r>
+            <a:r>
+              <a:rPr lang="es-419" sz="2800" dirty="0">
+                <a:solidFill>
+                  <a:srgbClr val="272525"/>
+                </a:solidFill>
+                <a:latin typeface="Source Serif 4 Semi Bold" pitchFamily="34" charset="0"/>
+                <a:ea typeface="Source Serif 4 Semi Bold" pitchFamily="34" charset="-122"/>
+              </a:rPr>
+              <a:t> estructurado directamente al flujo de agendamiento ambulatorio, que es donde hoy se pierden horas, se derivan mal los casos y se saturan las listas de espera.”</a:t>
+            </a:r>
+          </a:p>
+        </p:txBody>
+      </p:sp>
+      <p:pic>
+        <p:nvPicPr>
+          <p:cNvPr id="7" name="Imagen 6" descr="Icono&#10;&#10;El contenido generado por IA puede ser incorrecto.">
+            <a:extLst>
+              <a:ext uri="{FF2B5EF4-FFF2-40B4-BE49-F238E27FC236}">
+                <a16:creationId xmlns:a16="http://schemas.microsoft.com/office/drawing/2014/main" id="{BFD62974-382E-AE19-3C4B-110D62FF2F8C}"/>
+              </a:ext>
+            </a:extLst>
+          </p:cNvPr>
+          <p:cNvPicPr>
+            <a:picLocks noChangeAspect="1"/>
+          </p:cNvPicPr>
+          <p:nvPr/>
+        </p:nvPicPr>
+        <p:blipFill>
+          <a:blip r:embed="rId2"/>
+          <a:stretch>
+            <a:fillRect/>
+          </a:stretch>
+        </p:blipFill>
+        <p:spPr>
+          <a:xfrm>
+            <a:off x="9581322" y="3159714"/>
+            <a:ext cx="4391433" cy="1456285"/>
+          </a:xfrm>
+          <a:prstGeom prst="rect">
+            <a:avLst/>
+          </a:prstGeom>
+        </p:spPr>
+      </p:pic>
+      <p:pic>
+        <p:nvPicPr>
+          <p:cNvPr id="9" name="Imagen 8" descr="Texto, Logotipo&#10;&#10;El contenido generado por IA puede ser incorrecto.">
+            <a:extLst>
+              <a:ext uri="{FF2B5EF4-FFF2-40B4-BE49-F238E27FC236}">
+                <a16:creationId xmlns:a16="http://schemas.microsoft.com/office/drawing/2014/main" id="{45F3C6AB-180E-86D9-0036-92D7CB56CDA0}"/>
+              </a:ext>
+            </a:extLst>
+          </p:cNvPr>
+          <p:cNvPicPr>
+            <a:picLocks noChangeAspect="1"/>
+          </p:cNvPicPr>
+          <p:nvPr/>
+        </p:nvPicPr>
+        <p:blipFill>
+          <a:blip r:embed="rId3"/>
+          <a:stretch>
+            <a:fillRect/>
+          </a:stretch>
+        </p:blipFill>
+        <p:spPr>
+          <a:xfrm>
+            <a:off x="8073794" y="409537"/>
+            <a:ext cx="6810789" cy="2964567"/>
+          </a:xfrm>
+          <a:prstGeom prst="rect">
+            <a:avLst/>
+          </a:prstGeom>
+        </p:spPr>
+      </p:pic>
+      <p:pic>
+        <p:nvPicPr>
+          <p:cNvPr id="11" name="Imagen 10" descr="Texto, Logotipo&#10;&#10;El contenido generado por IA puede ser incorrecto.">
+            <a:extLst>
+              <a:ext uri="{FF2B5EF4-FFF2-40B4-BE49-F238E27FC236}">
+                <a16:creationId xmlns:a16="http://schemas.microsoft.com/office/drawing/2014/main" id="{79E34BD4-4EB5-F43B-5326-3CC1976B00B8}"/>
+              </a:ext>
+            </a:extLst>
+          </p:cNvPr>
+          <p:cNvPicPr>
+            <a:picLocks noChangeAspect="1"/>
+          </p:cNvPicPr>
+          <p:nvPr/>
+        </p:nvPicPr>
+        <p:blipFill>
+          <a:blip r:embed="rId4"/>
+          <a:stretch>
+            <a:fillRect/>
+          </a:stretch>
+        </p:blipFill>
+        <p:spPr>
+          <a:xfrm>
+            <a:off x="7513983" y="3887857"/>
+            <a:ext cx="6810789" cy="4540526"/>
+          </a:xfrm>
+          <a:prstGeom prst="rect">
+            <a:avLst/>
+          </a:prstGeom>
+        </p:spPr>
+      </p:pic>
+      <p:sp>
+        <p:nvSpPr>
+          <p:cNvPr id="12" name="Text 0">
+            <a:extLst>
+              <a:ext uri="{FF2B5EF4-FFF2-40B4-BE49-F238E27FC236}">
+                <a16:creationId xmlns:a16="http://schemas.microsoft.com/office/drawing/2014/main" id="{EB644F70-8139-47C1-A598-B36113F07B3A}"/>
+              </a:ext>
+            </a:extLst>
+          </p:cNvPr>
+          <p:cNvSpPr/>
+          <p:nvPr/>
+        </p:nvSpPr>
+        <p:spPr>
+          <a:xfrm>
+            <a:off x="3504178" y="414414"/>
+            <a:ext cx="5063353" cy="505716"/>
+          </a:xfrm>
+          <a:prstGeom prst="rect">
+            <a:avLst/>
+          </a:prstGeom>
+          <a:noFill/>
+          <a:ln/>
+        </p:spPr>
+        <p:txBody>
+          <a:bodyPr wrap="none" lIns="0" tIns="0" rIns="0" bIns="0" rtlCol="0" anchor="t"/>
+          <a:lstStyle/>
+          <a:p>
+            <a:pPr marL="0" indent="0" algn="l">
+              <a:lnSpc>
+                <a:spcPts val="4400"/>
+              </a:lnSpc>
+              <a:buNone/>
+            </a:pPr>
+            <a:r>
+              <a:rPr lang="es-419" sz="4000" dirty="0">
+                <a:solidFill>
+                  <a:srgbClr val="D73AD7"/>
+                </a:solidFill>
+                <a:latin typeface="Source Serif 4 Semi Bold" pitchFamily="34" charset="0"/>
+                <a:ea typeface="Source Serif 4 Semi Bold" pitchFamily="34" charset="-122"/>
+                <a:cs typeface="Source Serif 4 Semi Bold" pitchFamily="34" charset="-120"/>
+              </a:rPr>
+              <a:t>Propuesta de valor</a:t>
+            </a:r>
+            <a:endParaRPr lang="es-419" sz="4000" noProof="0" dirty="0">
+              <a:solidFill>
+                <a:srgbClr val="D73AD7"/>
+              </a:solidFill>
+              <a:latin typeface="Source Serif 4 Semi Bold" pitchFamily="34" charset="0"/>
+              <a:ea typeface="Source Serif 4 Semi Bold" pitchFamily="34" charset="-122"/>
+              <a:cs typeface="Source Serif 4 Semi Bold" pitchFamily="34" charset="-120"/>
+            </a:endParaRPr>
+          </a:p>
+        </p:txBody>
+      </p:sp>
+    </p:spTree>
+    <p:extLst>
+      <p:ext uri="{BB962C8B-B14F-4D97-AF65-F5344CB8AC3E}">
+        <p14:creationId xmlns:p14="http://schemas.microsoft.com/office/powerpoint/2010/main" val="2412710114"/>
+      </p:ext>
+    </p:extLst>
+  </p:cSld>
+  <p:clrMapOvr>
+    <a:masterClrMapping/>
+  </p:clrMapOvr>
+</p:sld>
+</file>
+
+<file path=ppt/slides/slide13.xml><?xml version="1.0" encoding="utf-8"?>
+<p:sld xmlns:a="http://schemas.openxmlformats.org/drawingml/2006/main" xmlns:r="http://schemas.openxmlformats.org/officeDocument/2006/relationships" xmlns:p="http://schemas.openxmlformats.org/presentationml/2006/main">
+  <p:cSld>
+    <p:spTree>
+      <p:nvGrpSpPr>
         <p:cNvPr id="1" name="">
           <a:extLst>
             <a:ext uri="{FF2B5EF4-FFF2-40B4-BE49-F238E27FC236}">
@@ -6924,7 +7261,7 @@
 </p:sld>
 </file>
 
-<file path=ppt/slides/slide13.xml><?xml version="1.0" encoding="utf-8"?>
+<file path=ppt/slides/slide14.xml><?xml version="1.0" encoding="utf-8"?>
 <p:sld xmlns:a="http://schemas.openxmlformats.org/drawingml/2006/main" xmlns:r="http://schemas.openxmlformats.org/officeDocument/2006/relationships" xmlns:p="http://schemas.openxmlformats.org/presentationml/2006/main">
   <p:cSld>
     <p:spTree>
@@ -7157,7 +7494,7 @@
 </p:sld>
 </file>
 
-<file path=ppt/slides/slide14.xml><?xml version="1.0" encoding="utf-8"?>
+<file path=ppt/slides/slide15.xml><?xml version="1.0" encoding="utf-8"?>
 <p:sld xmlns:a="http://schemas.openxmlformats.org/drawingml/2006/main" xmlns:r="http://schemas.openxmlformats.org/officeDocument/2006/relationships" xmlns:p="http://schemas.openxmlformats.org/presentationml/2006/main">
   <p:cSld>
     <p:spTree>
@@ -7396,7 +7733,7 @@
 </p:sld>
 </file>
 
-<file path=ppt/slides/slide15.xml><?xml version="1.0" encoding="utf-8"?>
+<file path=ppt/slides/slide16.xml><?xml version="1.0" encoding="utf-8"?>
 <p:sld xmlns:a="http://schemas.openxmlformats.org/drawingml/2006/main" xmlns:r="http://schemas.openxmlformats.org/officeDocument/2006/relationships" xmlns:p="http://schemas.openxmlformats.org/presentationml/2006/main">
   <p:cSld>
     <p:spTree>
@@ -11664,4 +12001,24 @@
     </a:ext>
   </a:extLst>
 </a:theme>
+</file>
+
+<file path=ppt/webextensions/taskpanes.xml><?xml version="1.0" encoding="utf-8"?>
+<wetp:taskpanes xmlns:wetp="http://schemas.microsoft.com/office/webextensions/taskpanes/2010/11">
+  <wetp:taskpane dockstate="right" visibility="0" width="350" row="3">
+    <wetp:webextensionref xmlns:r="http://schemas.openxmlformats.org/officeDocument/2006/relationships" r:id="rId1"/>
+  </wetp:taskpane>
+</wetp:taskpanes>
+</file>
+
+<file path=ppt/webextensions/webextension1.xml><?xml version="1.0" encoding="utf-8"?>
+<we:webextension xmlns:we="http://schemas.microsoft.com/office/webextensions/webextension/2010/11" id="{22D00D22-3FE2-4DC4-91DA-B1573F94762D}">
+  <we:reference id="WA200005566" version="3.0.0.3" store="Omex" storeType="OMEX"/>
+  <we:alternateReferences>
+    <we:reference id="WA200005566" version="3.0.0.3" store="WA200005566" storeType="OMEX"/>
+  </we:alternateReferences>
+  <we:properties/>
+  <we:bindings/>
+  <we:snapshot xmlns:r="http://schemas.openxmlformats.org/officeDocument/2006/relationships"/>
+</we:webextension>
 </file>
--- a/Fase 3/Evidencias Grupales/Presentación Proyecto.pptx
+++ b/Fase 3/Evidencias Grupales/Presentación Proyecto.pptx
@@ -5,7 +5,7 @@
     <p:sldMasterId id="2147483726" r:id="rId1"/>
   </p:sldMasterIdLst>
   <p:notesMasterIdLst>
-    <p:notesMasterId r:id="rId18"/>
+    <p:notesMasterId r:id="rId19"/>
   </p:notesMasterIdLst>
   <p:sldIdLst>
     <p:sldId id="256" r:id="rId2"/>
@@ -14,41 +14,42 @@
     <p:sldId id="259" r:id="rId5"/>
     <p:sldId id="260" r:id="rId6"/>
     <p:sldId id="265" r:id="rId7"/>
-    <p:sldId id="261" r:id="rId8"/>
-    <p:sldId id="262" r:id="rId9"/>
-    <p:sldId id="264" r:id="rId10"/>
-    <p:sldId id="278" r:id="rId11"/>
-    <p:sldId id="270" r:id="rId12"/>
-    <p:sldId id="283" r:id="rId13"/>
-    <p:sldId id="280" r:id="rId14"/>
-    <p:sldId id="282" r:id="rId15"/>
-    <p:sldId id="269" r:id="rId16"/>
-    <p:sldId id="274" r:id="rId17"/>
+    <p:sldId id="284" r:id="rId8"/>
+    <p:sldId id="261" r:id="rId9"/>
+    <p:sldId id="262" r:id="rId10"/>
+    <p:sldId id="264" r:id="rId11"/>
+    <p:sldId id="278" r:id="rId12"/>
+    <p:sldId id="270" r:id="rId13"/>
+    <p:sldId id="283" r:id="rId14"/>
+    <p:sldId id="280" r:id="rId15"/>
+    <p:sldId id="282" r:id="rId16"/>
+    <p:sldId id="269" r:id="rId17"/>
+    <p:sldId id="274" r:id="rId18"/>
   </p:sldIdLst>
   <p:sldSz cx="14630400" cy="8229600"/>
   <p:notesSz cx="8229600" cy="14630400"/>
   <p:embeddedFontLst>
     <p:embeddedFont>
       <p:font typeface="Aptos Narrow" panose="020B0004020202020204" pitchFamily="34" charset="0"/>
-      <p:regular r:id="rId19"/>
-      <p:bold r:id="rId20"/>
-      <p:italic r:id="rId21"/>
-      <p:boldItalic r:id="rId22"/>
+      <p:regular r:id="rId20"/>
+      <p:bold r:id="rId21"/>
+      <p:italic r:id="rId22"/>
+      <p:boldItalic r:id="rId23"/>
     </p:embeddedFont>
     <p:embeddedFont>
       <p:font typeface="Gill Sans MT" panose="020B0502020104020203" pitchFamily="34" charset="0"/>
-      <p:regular r:id="rId23"/>
-      <p:bold r:id="rId24"/>
-      <p:italic r:id="rId25"/>
-      <p:boldItalic r:id="rId26"/>
+      <p:regular r:id="rId24"/>
+      <p:bold r:id="rId25"/>
+      <p:italic r:id="rId26"/>
+      <p:boldItalic r:id="rId27"/>
     </p:embeddedFont>
     <p:embeddedFont>
       <p:font typeface="Source Sans 3" panose="020B0604020202020204" charset="0"/>
-      <p:regular r:id="rId27"/>
+      <p:regular r:id="rId28"/>
     </p:embeddedFont>
     <p:embeddedFont>
       <p:font typeface="Source Serif 4 Semi Bold" panose="020B0604020202020204" charset="0"/>
-      <p:regular r:id="rId28"/>
+      <p:regular r:id="rId29"/>
     </p:embeddedFont>
   </p:embeddedFontLst>
   <p:defaultTextStyle>
@@ -375,6 +376,97 @@
   <p:cSld>
     <p:spTree>
       <p:nvGrpSpPr>
+        <p:cNvPr id="1" name=""/>
+        <p:cNvGrpSpPr/>
+        <p:nvPr/>
+      </p:nvGrpSpPr>
+      <p:grpSpPr>
+        <a:xfrm>
+          <a:off x="0" y="0"/>
+          <a:ext cx="0" cy="0"/>
+          <a:chOff x="0" y="0"/>
+          <a:chExt cx="0" cy="0"/>
+        </a:xfrm>
+      </p:grpSpPr>
+      <p:sp>
+        <p:nvSpPr>
+          <p:cNvPr id="2" name="Slide Image Placeholder 1"/>
+          <p:cNvSpPr>
+            <a:spLocks noGrp="1" noRot="1" noChangeAspect="1"/>
+          </p:cNvSpPr>
+          <p:nvPr>
+            <p:ph type="sldImg"/>
+          </p:nvPr>
+        </p:nvSpPr>
+        <p:spPr/>
+        <p:txBody>
+          <a:bodyPr/>
+          <a:lstStyle/>
+          <a:p>
+            <a:endParaRPr lang="es-419"/>
+          </a:p>
+        </p:txBody>
+      </p:sp>
+      <p:sp>
+        <p:nvSpPr>
+          <p:cNvPr id="3" name="Notes Placeholder 2"/>
+          <p:cNvSpPr>
+            <a:spLocks noGrp="1"/>
+          </p:cNvSpPr>
+          <p:nvPr>
+            <p:ph type="body" idx="1"/>
+          </p:nvPr>
+        </p:nvSpPr>
+        <p:spPr/>
+        <p:txBody>
+          <a:bodyPr/>
+          <a:lstStyle/>
+          <a:p>
+            <a:endParaRPr lang="en-US" dirty="0"/>
+          </a:p>
+        </p:txBody>
+      </p:sp>
+      <p:sp>
+        <p:nvSpPr>
+          <p:cNvPr id="4" name="Slide Number Placeholder 3"/>
+          <p:cNvSpPr>
+            <a:spLocks noGrp="1"/>
+          </p:cNvSpPr>
+          <p:nvPr>
+            <p:ph type="sldNum" sz="quarter" idx="10"/>
+          </p:nvPr>
+        </p:nvSpPr>
+        <p:spPr/>
+        <p:txBody>
+          <a:bodyPr/>
+          <a:lstStyle/>
+          <a:p>
+            <a:fld id="{F7021451-1387-4CA6-816F-3879F97B5CBC}" type="slidenum">
+              <a:rPr lang="en-US"/>
+              <a:t>10</a:t>
+            </a:fld>
+            <a:endParaRPr lang="en-US"/>
+          </a:p>
+        </p:txBody>
+      </p:sp>
+    </p:spTree>
+    <p:extLst>
+      <p:ext uri="{BB962C8B-B14F-4D97-AF65-F5344CB8AC3E}">
+        <p14:creationId xmlns:p14="http://schemas.microsoft.com/office/powerpoint/2010/main" val="1024086991"/>
+      </p:ext>
+    </p:extLst>
+  </p:cSld>
+  <p:clrMapOvr>
+    <a:masterClrMapping/>
+  </p:clrMapOvr>
+</p:notes>
+</file>
+
+<file path=ppt/notesSlides/notesSlide11.xml><?xml version="1.0" encoding="utf-8"?>
+<p:notes xmlns:a="http://schemas.openxmlformats.org/drawingml/2006/main" xmlns:r="http://schemas.openxmlformats.org/officeDocument/2006/relationships" xmlns:p="http://schemas.openxmlformats.org/presentationml/2006/main">
+  <p:cSld>
+    <p:spTree>
+      <p:nvGrpSpPr>
         <p:cNvPr id="1" name="">
           <a:extLst>
             <a:ext uri="{FF2B5EF4-FFF2-40B4-BE49-F238E27FC236}">
@@ -466,7 +558,7 @@
           <a:p>
             <a:fld id="{F7021451-1387-4CA6-816F-3879F97B5CBC}" type="slidenum">
               <a:rPr lang="en-US"/>
-              <a:t>10</a:t>
+              <a:t>11</a:t>
             </a:fld>
             <a:endParaRPr lang="en-US"/>
           </a:p>
@@ -485,7 +577,7 @@
 </p:notes>
 </file>
 
-<file path=ppt/notesSlides/notesSlide11.xml><?xml version="1.0" encoding="utf-8"?>
+<file path=ppt/notesSlides/notesSlide12.xml><?xml version="1.0" encoding="utf-8"?>
 <p:notes xmlns:a="http://schemas.openxmlformats.org/drawingml/2006/main" xmlns:r="http://schemas.openxmlformats.org/officeDocument/2006/relationships" xmlns:p="http://schemas.openxmlformats.org/presentationml/2006/main">
   <p:cSld>
     <p:spTree>
@@ -581,7 +673,7 @@
           <a:p>
             <a:fld id="{F7021451-1387-4CA6-816F-3879F97B5CBC}" type="slidenum">
               <a:rPr lang="en-US"/>
-              <a:t>11</a:t>
+              <a:t>12</a:t>
             </a:fld>
             <a:endParaRPr lang="en-US"/>
           </a:p>
@@ -600,7 +692,7 @@
 </p:notes>
 </file>
 
-<file path=ppt/notesSlides/notesSlide12.xml><?xml version="1.0" encoding="utf-8"?>
+<file path=ppt/notesSlides/notesSlide13.xml><?xml version="1.0" encoding="utf-8"?>
 <p:notes xmlns:a="http://schemas.openxmlformats.org/drawingml/2006/main" xmlns:r="http://schemas.openxmlformats.org/officeDocument/2006/relationships" xmlns:p="http://schemas.openxmlformats.org/presentationml/2006/main">
   <p:cSld>
     <p:spTree>
@@ -696,7 +788,7 @@
           <a:p>
             <a:fld id="{F7021451-1387-4CA6-816F-3879F97B5CBC}" type="slidenum">
               <a:rPr lang="en-US"/>
-              <a:t>13</a:t>
+              <a:t>14</a:t>
             </a:fld>
             <a:endParaRPr lang="en-US"/>
           </a:p>
@@ -715,7 +807,7 @@
 </p:notes>
 </file>
 
-<file path=ppt/notesSlides/notesSlide13.xml><?xml version="1.0" encoding="utf-8"?>
+<file path=ppt/notesSlides/notesSlide14.xml><?xml version="1.0" encoding="utf-8"?>
 <p:notes xmlns:a="http://schemas.openxmlformats.org/drawingml/2006/main" xmlns:r="http://schemas.openxmlformats.org/officeDocument/2006/relationships" xmlns:p="http://schemas.openxmlformats.org/presentationml/2006/main">
   <p:cSld>
     <p:spTree>
@@ -811,7 +903,7 @@
           <a:p>
             <a:fld id="{F7021451-1387-4CA6-816F-3879F97B5CBC}" type="slidenum">
               <a:rPr lang="en-US"/>
-              <a:t>14</a:t>
+              <a:t>15</a:t>
             </a:fld>
             <a:endParaRPr lang="en-US"/>
           </a:p>
@@ -830,7 +922,7 @@
 </p:notes>
 </file>
 
-<file path=ppt/notesSlides/notesSlide14.xml><?xml version="1.0" encoding="utf-8"?>
+<file path=ppt/notesSlides/notesSlide15.xml><?xml version="1.0" encoding="utf-8"?>
 <p:notes xmlns:a="http://schemas.openxmlformats.org/drawingml/2006/main" xmlns:r="http://schemas.openxmlformats.org/officeDocument/2006/relationships" xmlns:p="http://schemas.openxmlformats.org/presentationml/2006/main">
   <p:cSld>
     <p:spTree>
@@ -926,7 +1018,7 @@
           <a:p>
             <a:fld id="{F7021451-1387-4CA6-816F-3879F97B5CBC}" type="slidenum">
               <a:rPr lang="en-US"/>
-              <a:t>15</a:t>
+              <a:t>16</a:t>
             </a:fld>
             <a:endParaRPr lang="en-US"/>
           </a:p>
@@ -945,7 +1037,7 @@
 </p:notes>
 </file>
 
-<file path=ppt/notesSlides/notesSlide15.xml><?xml version="1.0" encoding="utf-8"?>
+<file path=ppt/notesSlides/notesSlide16.xml><?xml version="1.0" encoding="utf-8"?>
 <p:notes xmlns:a="http://schemas.openxmlformats.org/drawingml/2006/main" xmlns:r="http://schemas.openxmlformats.org/officeDocument/2006/relationships" xmlns:p="http://schemas.openxmlformats.org/presentationml/2006/main">
   <p:cSld>
     <p:spTree>
@@ -1041,7 +1133,7 @@
           <a:p>
             <a:fld id="{F7021451-1387-4CA6-816F-3879F97B5CBC}" type="slidenum">
               <a:rPr lang="en-US"/>
-              <a:t>16</a:t>
+              <a:t>17</a:t>
             </a:fld>
             <a:endParaRPr lang="en-US"/>
           </a:p>
@@ -1520,7 +1612,13 @@
   <p:cSld>
     <p:spTree>
       <p:nvGrpSpPr>
-        <p:cNvPr id="1" name=""/>
+        <p:cNvPr id="1" name="">
+          <a:extLst>
+            <a:ext uri="{FF2B5EF4-FFF2-40B4-BE49-F238E27FC236}">
+              <a16:creationId xmlns:a16="http://schemas.microsoft.com/office/drawing/2014/main" id="{CD9DF1C7-5D46-42BF-3474-E551ED552C8B}"/>
+            </a:ext>
+          </a:extLst>
+        </p:cNvPr>
         <p:cNvGrpSpPr/>
         <p:nvPr/>
       </p:nvGrpSpPr>
@@ -1534,7 +1632,13 @@
       </p:grpSpPr>
       <p:sp>
         <p:nvSpPr>
-          <p:cNvPr id="2" name="Slide Image Placeholder 1"/>
+          <p:cNvPr id="2" name="Slide Image Placeholder 1">
+            <a:extLst>
+              <a:ext uri="{FF2B5EF4-FFF2-40B4-BE49-F238E27FC236}">
+                <a16:creationId xmlns:a16="http://schemas.microsoft.com/office/drawing/2014/main" id="{159A7CDF-8ED7-DD61-A761-D540D325EFA4}"/>
+              </a:ext>
+            </a:extLst>
+          </p:cNvPr>
           <p:cNvSpPr>
             <a:spLocks noGrp="1" noRot="1" noChangeAspect="1"/>
           </p:cNvSpPr>
@@ -1553,7 +1657,13 @@
       </p:sp>
       <p:sp>
         <p:nvSpPr>
-          <p:cNvPr id="3" name="Notes Placeholder 2"/>
+          <p:cNvPr id="3" name="Notes Placeholder 2">
+            <a:extLst>
+              <a:ext uri="{FF2B5EF4-FFF2-40B4-BE49-F238E27FC236}">
+                <a16:creationId xmlns:a16="http://schemas.microsoft.com/office/drawing/2014/main" id="{DCCC849A-559B-BB42-293C-CE501FE90F56}"/>
+              </a:ext>
+            </a:extLst>
+          </p:cNvPr>
           <p:cNvSpPr>
             <a:spLocks noGrp="1"/>
           </p:cNvSpPr>
@@ -1572,7 +1682,13 @@
       </p:sp>
       <p:sp>
         <p:nvSpPr>
-          <p:cNvPr id="4" name="Slide Number Placeholder 3"/>
+          <p:cNvPr id="4" name="Slide Number Placeholder 3">
+            <a:extLst>
+              <a:ext uri="{FF2B5EF4-FFF2-40B4-BE49-F238E27FC236}">
+                <a16:creationId xmlns:a16="http://schemas.microsoft.com/office/drawing/2014/main" id="{0246884C-D616-8B47-0B1A-260DE509437B}"/>
+              </a:ext>
+            </a:extLst>
+          </p:cNvPr>
           <p:cNvSpPr>
             <a:spLocks noGrp="1"/>
           </p:cNvSpPr>
@@ -1596,7 +1712,7 @@
     </p:spTree>
     <p:extLst>
       <p:ext uri="{BB962C8B-B14F-4D97-AF65-F5344CB8AC3E}">
-        <p14:creationId xmlns:p14="http://schemas.microsoft.com/office/powerpoint/2010/main" val="1024086991"/>
+        <p14:creationId xmlns:p14="http://schemas.microsoft.com/office/powerpoint/2010/main" val="817495551"/>
       </p:ext>
     </p:extLst>
   </p:cSld>
@@ -1927,7 +2043,7 @@
           <a:p>
             <a:fld id="{48A87A34-81AB-432B-8DAE-1953F412C126}" type="datetimeFigureOut">
               <a:rPr lang="en-US" smtClean="0"/>
-              <a:t>11/25/2025</a:t>
+              <a:t>12/2/2025</a:t>
             </a:fld>
             <a:endParaRPr lang="en-US" dirty="0"/>
           </a:p>
@@ -2139,7 +2255,7 @@
           <a:p>
             <a:fld id="{48A87A34-81AB-432B-8DAE-1953F412C126}" type="datetimeFigureOut">
               <a:rPr lang="en-US" smtClean="0"/>
-              <a:t>11/25/2025</a:t>
+              <a:t>12/2/2025</a:t>
             </a:fld>
             <a:endParaRPr lang="en-US" dirty="0"/>
           </a:p>
@@ -2355,7 +2471,7 @@
           <a:p>
             <a:fld id="{48A87A34-81AB-432B-8DAE-1953F412C126}" type="datetimeFigureOut">
               <a:rPr lang="en-US" smtClean="0"/>
-              <a:t>11/25/2025</a:t>
+              <a:t>12/2/2025</a:t>
             </a:fld>
             <a:endParaRPr lang="en-US" dirty="0"/>
           </a:p>
@@ -2797,7 +2913,7 @@
           <a:p>
             <a:fld id="{48A87A34-81AB-432B-8DAE-1953F412C126}" type="datetimeFigureOut">
               <a:rPr lang="en-US" smtClean="0"/>
-              <a:t>11/25/2025</a:t>
+              <a:t>12/2/2025</a:t>
             </a:fld>
             <a:endParaRPr lang="en-US" dirty="0"/>
           </a:p>
@@ -3107,7 +3223,7 @@
           <a:p>
             <a:fld id="{48A87A34-81AB-432B-8DAE-1953F412C126}" type="datetimeFigureOut">
               <a:rPr lang="en-US" smtClean="0"/>
-              <a:t>11/25/2025</a:t>
+              <a:t>12/2/2025</a:t>
             </a:fld>
             <a:endParaRPr lang="en-US" dirty="0"/>
           </a:p>
@@ -3376,7 +3492,7 @@
           <a:p>
             <a:fld id="{48A87A34-81AB-432B-8DAE-1953F412C126}" type="datetimeFigureOut">
               <a:rPr lang="en-US" smtClean="0"/>
-              <a:t>11/25/2025</a:t>
+              <a:t>12/2/2025</a:t>
             </a:fld>
             <a:endParaRPr lang="en-US" dirty="0"/>
           </a:p>
@@ -3793,7 +3909,7 @@
           <a:p>
             <a:fld id="{48A87A34-81AB-432B-8DAE-1953F412C126}" type="datetimeFigureOut">
               <a:rPr lang="en-US" smtClean="0"/>
-              <a:t>11/25/2025</a:t>
+              <a:t>12/2/2025</a:t>
             </a:fld>
             <a:endParaRPr lang="en-US" dirty="0"/>
           </a:p>
@@ -3943,7 +4059,7 @@
           <a:p>
             <a:fld id="{48A87A34-81AB-432B-8DAE-1953F412C126}" type="datetimeFigureOut">
               <a:rPr lang="en-US" smtClean="0"/>
-              <a:t>11/25/2025</a:t>
+              <a:t>12/2/2025</a:t>
             </a:fld>
             <a:endParaRPr lang="en-US" dirty="0"/>
           </a:p>
@@ -4070,7 +4186,7 @@
           <a:p>
             <a:fld id="{48A87A34-81AB-432B-8DAE-1953F412C126}" type="datetimeFigureOut">
               <a:rPr lang="en-US" smtClean="0"/>
-              <a:t>11/25/2025</a:t>
+              <a:t>12/2/2025</a:t>
             </a:fld>
             <a:endParaRPr lang="en-US" dirty="0"/>
           </a:p>
@@ -4322,7 +4438,7 @@
           <a:p>
             <a:fld id="{48A87A34-81AB-432B-8DAE-1953F412C126}" type="datetimeFigureOut">
               <a:rPr lang="en-US" smtClean="0"/>
-              <a:t>11/25/2025</a:t>
+              <a:t>12/2/2025</a:t>
             </a:fld>
             <a:endParaRPr lang="en-US" dirty="0"/>
           </a:p>
@@ -4783,7 +4899,7 @@
             <a:fld id="{48A87A34-81AB-432B-8DAE-1953F412C126}" type="datetimeFigureOut">
               <a:rPr lang="en-US" smtClean="0"/>
               <a:pPr/>
-              <a:t>11/25/2025</a:t>
+              <a:t>12/2/2025</a:t>
             </a:fld>
             <a:endParaRPr lang="en-US" dirty="0"/>
           </a:p>
@@ -5119,7 +5235,7 @@
             <a:fld id="{48A87A34-81AB-432B-8DAE-1953F412C126}" type="datetimeFigureOut">
               <a:rPr lang="en-US" smtClean="0"/>
               <a:pPr/>
-              <a:t>11/25/2025</a:t>
+              <a:t>12/2/2025</a:t>
             </a:fld>
             <a:endParaRPr lang="en-US" dirty="0"/>
           </a:p>
@@ -5861,6 +5977,386 @@
 
 <file path=ppt/slides/slide10.xml><?xml version="1.0" encoding="utf-8"?>
 <p:sld xmlns:a="http://schemas.openxmlformats.org/drawingml/2006/main" xmlns:r="http://schemas.openxmlformats.org/officeDocument/2006/relationships" xmlns:p="http://schemas.openxmlformats.org/presentationml/2006/main">
+  <p:cSld name="Slide 9">
+    <p:spTree>
+      <p:nvGrpSpPr>
+        <p:cNvPr id="1" name=""/>
+        <p:cNvGrpSpPr/>
+        <p:nvPr/>
+      </p:nvGrpSpPr>
+      <p:grpSpPr>
+        <a:xfrm>
+          <a:off x="0" y="0"/>
+          <a:ext cx="0" cy="0"/>
+          <a:chOff x="0" y="0"/>
+          <a:chExt cx="0" cy="0"/>
+        </a:xfrm>
+      </p:grpSpPr>
+      <p:pic>
+        <p:nvPicPr>
+          <p:cNvPr id="2" name="Image 0" descr="preencoded.png"/>
+          <p:cNvPicPr>
+            <a:picLocks noChangeAspect="1"/>
+          </p:cNvPicPr>
+          <p:nvPr/>
+        </p:nvPicPr>
+        <p:blipFill>
+          <a:blip r:embed="rId3"/>
+          <a:stretch>
+            <a:fillRect/>
+          </a:stretch>
+        </p:blipFill>
+        <p:spPr>
+          <a:xfrm>
+            <a:off x="0" y="0"/>
+            <a:ext cx="5486400" cy="8229600"/>
+          </a:xfrm>
+          <a:prstGeom prst="rect">
+            <a:avLst/>
+          </a:prstGeom>
+        </p:spPr>
+      </p:pic>
+      <p:sp>
+        <p:nvSpPr>
+          <p:cNvPr id="3" name="Text 0"/>
+          <p:cNvSpPr/>
+          <p:nvPr/>
+        </p:nvSpPr>
+        <p:spPr>
+          <a:xfrm>
+            <a:off x="6324124" y="723900"/>
+            <a:ext cx="7468553" cy="1408033"/>
+          </a:xfrm>
+          <a:prstGeom prst="rect">
+            <a:avLst/>
+          </a:prstGeom>
+          <a:noFill/>
+          <a:ln/>
+        </p:spPr>
+        <p:txBody>
+          <a:bodyPr wrap="square" lIns="0" tIns="0" rIns="0" bIns="0" rtlCol="0" anchor="t"/>
+          <a:lstStyle/>
+          <a:p>
+            <a:pPr marL="0" indent="0" algn="l">
+              <a:lnSpc>
+                <a:spcPts val="5500"/>
+              </a:lnSpc>
+              <a:buNone/>
+            </a:pPr>
+            <a:r>
+              <a:rPr lang="es-419" sz="4400" noProof="0" dirty="0">
+                <a:solidFill>
+                  <a:srgbClr val="D73AD7"/>
+                </a:solidFill>
+                <a:latin typeface="Source Serif 4 Semi Bold" pitchFamily="34" charset="0"/>
+                <a:ea typeface="Source Serif 4 Semi Bold" pitchFamily="34" charset="-122"/>
+                <a:cs typeface="Source Serif 4 Semi Bold" pitchFamily="34" charset="-120"/>
+              </a:rPr>
+              <a:t>Tecnologías que Impulsan MediTriage</a:t>
+            </a:r>
+            <a:endParaRPr lang="es-419" sz="4400" noProof="0" dirty="0"/>
+          </a:p>
+        </p:txBody>
+      </p:sp>
+      <p:sp>
+        <p:nvSpPr>
+          <p:cNvPr id="4" name="Text 1"/>
+          <p:cNvSpPr/>
+          <p:nvPr/>
+        </p:nvSpPr>
+        <p:spPr>
+          <a:xfrm>
+            <a:off x="5866924" y="2107883"/>
+            <a:ext cx="8463673" cy="5132366"/>
+          </a:xfrm>
+          <a:prstGeom prst="rect">
+            <a:avLst/>
+          </a:prstGeom>
+          <a:noFill/>
+          <a:ln/>
+        </p:spPr>
+        <p:txBody>
+          <a:bodyPr wrap="square" lIns="0" tIns="0" rIns="0" bIns="0" rtlCol="0" anchor="t"/>
+          <a:lstStyle/>
+          <a:p>
+            <a:pPr marL="342900" indent="-342900" algn="l">
+              <a:lnSpc>
+                <a:spcPct val="200000"/>
+              </a:lnSpc>
+              <a:buSzPct val="100000"/>
+              <a:buFont typeface="Arial" panose="020B0604020202020204" pitchFamily="34" charset="0"/>
+              <a:buChar char="•"/>
+            </a:pPr>
+            <a:r>
+              <a:rPr lang="es-419" sz="2400" noProof="0" dirty="0" err="1">
+                <a:solidFill>
+                  <a:srgbClr val="272525"/>
+                </a:solidFill>
+                <a:latin typeface="Source Sans 3" pitchFamily="34" charset="0"/>
+                <a:ea typeface="Source Sans 3" pitchFamily="34" charset="-122"/>
+                <a:cs typeface="Source Sans 3" pitchFamily="34" charset="-120"/>
+              </a:rPr>
+              <a:t>Backend</a:t>
+            </a:r>
+            <a:r>
+              <a:rPr lang="es-419" sz="2400" noProof="0" dirty="0">
+                <a:solidFill>
+                  <a:srgbClr val="272525"/>
+                </a:solidFill>
+                <a:latin typeface="Source Sans 3" pitchFamily="34" charset="0"/>
+                <a:ea typeface="Source Sans 3" pitchFamily="34" charset="-122"/>
+                <a:cs typeface="Source Sans 3" pitchFamily="34" charset="-120"/>
+              </a:rPr>
+              <a:t>: .NET 8 Web API (C#), </a:t>
+            </a:r>
+            <a:r>
+              <a:rPr lang="es-419" sz="2400" noProof="0" dirty="0" err="1">
+                <a:solidFill>
+                  <a:srgbClr val="272525"/>
+                </a:solidFill>
+                <a:latin typeface="Source Sans 3" pitchFamily="34" charset="0"/>
+                <a:ea typeface="Source Sans 3" pitchFamily="34" charset="-122"/>
+                <a:cs typeface="Source Sans 3" pitchFamily="34" charset="-120"/>
+              </a:rPr>
+              <a:t>Entity</a:t>
+            </a:r>
+            <a:r>
+              <a:rPr lang="es-419" sz="2400" noProof="0" dirty="0">
+                <a:solidFill>
+                  <a:srgbClr val="272525"/>
+                </a:solidFill>
+                <a:latin typeface="Source Sans 3" pitchFamily="34" charset="0"/>
+                <a:ea typeface="Source Sans 3" pitchFamily="34" charset="-122"/>
+                <a:cs typeface="Source Sans 3" pitchFamily="34" charset="-120"/>
+              </a:rPr>
+              <a:t> Framework Core, SQL Server</a:t>
+            </a:r>
+          </a:p>
+          <a:p>
+            <a:pPr marL="342900" indent="-342900" algn="l">
+              <a:lnSpc>
+                <a:spcPct val="200000"/>
+              </a:lnSpc>
+              <a:buSzPct val="100000"/>
+              <a:buFont typeface="Arial" panose="020B0604020202020204" pitchFamily="34" charset="0"/>
+              <a:buChar char="•"/>
+            </a:pPr>
+            <a:r>
+              <a:rPr lang="es-419" sz="2400" noProof="0" dirty="0" err="1">
+                <a:solidFill>
+                  <a:srgbClr val="272525"/>
+                </a:solidFill>
+                <a:latin typeface="Source Sans 3" pitchFamily="34" charset="0"/>
+                <a:ea typeface="Source Sans 3" pitchFamily="34" charset="-122"/>
+                <a:cs typeface="Source Sans 3" pitchFamily="34" charset="-120"/>
+              </a:rPr>
+              <a:t>Frontend</a:t>
+            </a:r>
+            <a:r>
+              <a:rPr lang="es-419" sz="2400" noProof="0" dirty="0">
+                <a:solidFill>
+                  <a:srgbClr val="272525"/>
+                </a:solidFill>
+                <a:latin typeface="Source Sans 3" pitchFamily="34" charset="0"/>
+                <a:ea typeface="Source Sans 3" pitchFamily="34" charset="-122"/>
+                <a:cs typeface="Source Sans 3" pitchFamily="34" charset="-120"/>
+              </a:rPr>
+              <a:t>: </a:t>
+            </a:r>
+            <a:r>
+              <a:rPr lang="es-419" sz="2400" noProof="0" dirty="0" err="1">
+                <a:solidFill>
+                  <a:srgbClr val="272525"/>
+                </a:solidFill>
+                <a:latin typeface="Source Sans 3" pitchFamily="34" charset="0"/>
+                <a:ea typeface="Source Sans 3" pitchFamily="34" charset="-122"/>
+                <a:cs typeface="Source Sans 3" pitchFamily="34" charset="-120"/>
+              </a:rPr>
+              <a:t>React</a:t>
+            </a:r>
+            <a:r>
+              <a:rPr lang="es-419" sz="2400" noProof="0" dirty="0">
+                <a:solidFill>
+                  <a:srgbClr val="272525"/>
+                </a:solidFill>
+                <a:latin typeface="Source Sans 3" pitchFamily="34" charset="0"/>
+                <a:ea typeface="Source Sans 3" pitchFamily="34" charset="-122"/>
+                <a:cs typeface="Source Sans 3" pitchFamily="34" charset="-120"/>
+              </a:rPr>
+              <a:t> + Vite + </a:t>
+            </a:r>
+            <a:r>
+              <a:rPr lang="es-419" sz="2400" noProof="0" dirty="0" err="1">
+                <a:solidFill>
+                  <a:srgbClr val="272525"/>
+                </a:solidFill>
+                <a:latin typeface="Source Sans 3" pitchFamily="34" charset="0"/>
+                <a:ea typeface="Source Sans 3" pitchFamily="34" charset="-122"/>
+                <a:cs typeface="Source Sans 3" pitchFamily="34" charset="-120"/>
+              </a:rPr>
+              <a:t>TypeScript</a:t>
+            </a:r>
+            <a:r>
+              <a:rPr lang="es-419" sz="2400" noProof="0" dirty="0">
+                <a:solidFill>
+                  <a:srgbClr val="272525"/>
+                </a:solidFill>
+                <a:latin typeface="Source Sans 3" pitchFamily="34" charset="0"/>
+                <a:ea typeface="Source Sans 3" pitchFamily="34" charset="-122"/>
+                <a:cs typeface="Source Sans 3" pitchFamily="34" charset="-120"/>
+              </a:rPr>
+              <a:t> + </a:t>
+            </a:r>
+            <a:r>
+              <a:rPr lang="es-419" sz="2400" noProof="0" dirty="0" err="1">
+                <a:solidFill>
+                  <a:srgbClr val="272525"/>
+                </a:solidFill>
+                <a:latin typeface="Source Sans 3" pitchFamily="34" charset="0"/>
+                <a:ea typeface="Source Sans 3" pitchFamily="34" charset="-122"/>
+                <a:cs typeface="Source Sans 3" pitchFamily="34" charset="-120"/>
+              </a:rPr>
+              <a:t>Tailwind</a:t>
+            </a:r>
+            <a:r>
+              <a:rPr lang="es-419" sz="2400" noProof="0" dirty="0">
+                <a:solidFill>
+                  <a:srgbClr val="272525"/>
+                </a:solidFill>
+                <a:latin typeface="Source Sans 3" pitchFamily="34" charset="0"/>
+                <a:ea typeface="Source Sans 3" pitchFamily="34" charset="-122"/>
+                <a:cs typeface="Source Sans 3" pitchFamily="34" charset="-120"/>
+              </a:rPr>
+              <a:t> CSS</a:t>
+            </a:r>
+          </a:p>
+          <a:p>
+            <a:pPr marL="342900" indent="-342900" algn="l">
+              <a:lnSpc>
+                <a:spcPct val="200000"/>
+              </a:lnSpc>
+              <a:buSzPct val="100000"/>
+              <a:buFont typeface="Arial" panose="020B0604020202020204" pitchFamily="34" charset="0"/>
+              <a:buChar char="•"/>
+            </a:pPr>
+            <a:r>
+              <a:rPr lang="es-419" sz="2400" noProof="0" dirty="0">
+                <a:solidFill>
+                  <a:srgbClr val="272525"/>
+                </a:solidFill>
+                <a:latin typeface="Source Sans 3" pitchFamily="34" charset="0"/>
+                <a:ea typeface="Source Sans 3" pitchFamily="34" charset="-122"/>
+                <a:cs typeface="Source Sans 3" pitchFamily="34" charset="-120"/>
+              </a:rPr>
+              <a:t>IA: </a:t>
+            </a:r>
+            <a:r>
+              <a:rPr lang="es-419" sz="2400" noProof="0" dirty="0" err="1">
+                <a:solidFill>
+                  <a:srgbClr val="272525"/>
+                </a:solidFill>
+                <a:latin typeface="Source Sans 3" pitchFamily="34" charset="0"/>
+                <a:ea typeface="Source Sans 3" pitchFamily="34" charset="-122"/>
+                <a:cs typeface="Source Sans 3" pitchFamily="34" charset="-120"/>
+              </a:rPr>
+              <a:t>OpenAI</a:t>
+            </a:r>
+            <a:r>
+              <a:rPr lang="es-419" sz="2400" noProof="0" dirty="0">
+                <a:solidFill>
+                  <a:srgbClr val="272525"/>
+                </a:solidFill>
+                <a:latin typeface="Source Sans 3" pitchFamily="34" charset="0"/>
+                <a:ea typeface="Source Sans 3" pitchFamily="34" charset="-122"/>
+                <a:cs typeface="Source Sans 3" pitchFamily="34" charset="-120"/>
+              </a:rPr>
+              <a:t> API (modelo GPT‑4o o GPT‑5, a definir en configuración)</a:t>
+            </a:r>
+          </a:p>
+          <a:p>
+            <a:pPr marL="342900" indent="-342900" algn="l">
+              <a:lnSpc>
+                <a:spcPct val="200000"/>
+              </a:lnSpc>
+              <a:buSzPct val="100000"/>
+              <a:buFont typeface="Arial" panose="020B0604020202020204" pitchFamily="34" charset="0"/>
+              <a:buChar char="•"/>
+            </a:pPr>
+            <a:r>
+              <a:rPr lang="es-419" sz="2400" noProof="0" dirty="0">
+                <a:solidFill>
+                  <a:srgbClr val="272525"/>
+                </a:solidFill>
+                <a:latin typeface="Source Sans 3" pitchFamily="34" charset="0"/>
+                <a:ea typeface="Source Sans 3" pitchFamily="34" charset="-122"/>
+                <a:cs typeface="Source Sans 3" pitchFamily="34" charset="-120"/>
+              </a:rPr>
+              <a:t> Autenticación: JWT con roles (Paciente, Médico, Administrador)</a:t>
+            </a:r>
+          </a:p>
+          <a:p>
+            <a:pPr marL="342900" indent="-342900" algn="l">
+              <a:lnSpc>
+                <a:spcPct val="200000"/>
+              </a:lnSpc>
+              <a:buSzPct val="100000"/>
+              <a:buFont typeface="Arial" panose="020B0604020202020204" pitchFamily="34" charset="0"/>
+              <a:buChar char="•"/>
+            </a:pPr>
+            <a:r>
+              <a:rPr lang="es-419" sz="2400" noProof="0" dirty="0" err="1">
+                <a:solidFill>
+                  <a:srgbClr val="272525"/>
+                </a:solidFill>
+                <a:latin typeface="Source Sans 3" pitchFamily="34" charset="0"/>
+                <a:ea typeface="Source Sans 3" pitchFamily="34" charset="-122"/>
+                <a:cs typeface="Source Sans 3" pitchFamily="34" charset="-120"/>
+              </a:rPr>
+              <a:t>Observabilidad</a:t>
+            </a:r>
+            <a:r>
+              <a:rPr lang="es-419" sz="2400" noProof="0" dirty="0">
+                <a:solidFill>
+                  <a:srgbClr val="272525"/>
+                </a:solidFill>
+                <a:latin typeface="Source Sans 3" pitchFamily="34" charset="0"/>
+                <a:ea typeface="Source Sans 3" pitchFamily="34" charset="-122"/>
+                <a:cs typeface="Source Sans 3" pitchFamily="34" charset="-120"/>
+              </a:rPr>
+              <a:t>: logs estructurados y métricas básicas</a:t>
+            </a:r>
+            <a:r>
+              <a:rPr lang="es-419" sz="2400" dirty="0">
+                <a:solidFill>
+                  <a:srgbClr val="272525"/>
+                </a:solidFill>
+                <a:latin typeface="Source Sans 3" pitchFamily="34" charset="0"/>
+                <a:ea typeface="Source Sans 3" pitchFamily="34" charset="-122"/>
+                <a:cs typeface="Source Sans 3" pitchFamily="34" charset="-120"/>
+              </a:rPr>
+              <a:t>.</a:t>
+            </a:r>
+            <a:endParaRPr lang="es-419" sz="2400" noProof="0" dirty="0">
+              <a:solidFill>
+                <a:srgbClr val="272525"/>
+              </a:solidFill>
+              <a:latin typeface="Source Sans 3" pitchFamily="34" charset="0"/>
+              <a:ea typeface="Source Sans 3" pitchFamily="34" charset="-122"/>
+              <a:cs typeface="Source Sans 3" pitchFamily="34" charset="-120"/>
+            </a:endParaRPr>
+          </a:p>
+        </p:txBody>
+      </p:sp>
+    </p:spTree>
+  </p:cSld>
+  <p:clrMapOvr>
+    <a:masterClrMapping/>
+  </p:clrMapOvr>
+</p:sld>
+</file>
+
+<file path=ppt/slides/slide11.xml><?xml version="1.0" encoding="utf-8"?>
+<p:sld xmlns:a="http://schemas.openxmlformats.org/drawingml/2006/main" xmlns:r="http://schemas.openxmlformats.org/officeDocument/2006/relationships" xmlns:p="http://schemas.openxmlformats.org/presentationml/2006/main">
   <p:cSld>
     <p:spTree>
       <p:nvGrpSpPr>
@@ -6022,7 +6518,7 @@
 </p:sld>
 </file>
 
-<file path=ppt/slides/slide11.xml><?xml version="1.0" encoding="utf-8"?>
+<file path=ppt/slides/slide12.xml><?xml version="1.0" encoding="utf-8"?>
 <p:sld xmlns:a="http://schemas.openxmlformats.org/drawingml/2006/main" xmlns:r="http://schemas.openxmlformats.org/officeDocument/2006/relationships" xmlns:p="http://schemas.openxmlformats.org/presentationml/2006/main">
   <p:cSld>
     <p:spTree>
@@ -6233,7 +6729,7 @@
 </p:sld>
 </file>
 
-<file path=ppt/slides/slide12.xml><?xml version="1.0" encoding="utf-8"?>
+<file path=ppt/slides/slide13.xml><?xml version="1.0" encoding="utf-8"?>
 <p:sld xmlns:a="http://schemas.openxmlformats.org/drawingml/2006/main" xmlns:r="http://schemas.openxmlformats.org/officeDocument/2006/relationships" xmlns:p="http://schemas.openxmlformats.org/presentationml/2006/main">
   <p:cSld>
     <p:spTree>
@@ -6569,7 +7065,7 @@
 </p:sld>
 </file>
 
-<file path=ppt/slides/slide13.xml><?xml version="1.0" encoding="utf-8"?>
+<file path=ppt/slides/slide14.xml><?xml version="1.0" encoding="utf-8"?>
 <p:sld xmlns:a="http://schemas.openxmlformats.org/drawingml/2006/main" xmlns:r="http://schemas.openxmlformats.org/officeDocument/2006/relationships" xmlns:p="http://schemas.openxmlformats.org/presentationml/2006/main">
   <p:cSld>
     <p:spTree>
@@ -7261,7 +7757,7 @@
 </p:sld>
 </file>
 
-<file path=ppt/slides/slide14.xml><?xml version="1.0" encoding="utf-8"?>
+<file path=ppt/slides/slide15.xml><?xml version="1.0" encoding="utf-8"?>
 <p:sld xmlns:a="http://schemas.openxmlformats.org/drawingml/2006/main" xmlns:r="http://schemas.openxmlformats.org/officeDocument/2006/relationships" xmlns:p="http://schemas.openxmlformats.org/presentationml/2006/main">
   <p:cSld>
     <p:spTree>
@@ -7494,7 +7990,7 @@
 </p:sld>
 </file>
 
-<file path=ppt/slides/slide15.xml><?xml version="1.0" encoding="utf-8"?>
+<file path=ppt/slides/slide16.xml><?xml version="1.0" encoding="utf-8"?>
 <p:sld xmlns:a="http://schemas.openxmlformats.org/drawingml/2006/main" xmlns:r="http://schemas.openxmlformats.org/officeDocument/2006/relationships" xmlns:p="http://schemas.openxmlformats.org/presentationml/2006/main">
   <p:cSld>
     <p:spTree>
@@ -7733,7 +8229,7 @@
 </p:sld>
 </file>
 
-<file path=ppt/slides/slide16.xml><?xml version="1.0" encoding="utf-8"?>
+<file path=ppt/slides/slide17.xml><?xml version="1.0" encoding="utf-8"?>
 <p:sld xmlns:a="http://schemas.openxmlformats.org/drawingml/2006/main" xmlns:r="http://schemas.openxmlformats.org/officeDocument/2006/relationships" xmlns:p="http://schemas.openxmlformats.org/presentationml/2006/main">
   <p:cSld>
     <p:spTree>
@@ -9262,8 +9758,8 @@
         </p:nvSpPr>
         <p:spPr>
           <a:xfrm>
-            <a:off x="1684565" y="1199842"/>
-            <a:ext cx="9972517" cy="4670509"/>
+            <a:off x="1807482" y="1269237"/>
+            <a:ext cx="11015435" cy="5128327"/>
           </a:xfrm>
           <a:prstGeom prst="rect">
             <a:avLst/>
@@ -9284,7 +9780,7 @@
               <a:buChar char="•"/>
             </a:pPr>
             <a:r>
-              <a:rPr lang="es-419" sz="2000" dirty="0">
+              <a:rPr lang="es-419" sz="2200" dirty="0">
                 <a:solidFill>
                   <a:srgbClr val="272525"/>
                 </a:solidFill>
@@ -9302,7 +9798,7 @@
               <a:buChar char="•"/>
             </a:pPr>
             <a:r>
-              <a:rPr lang="es-419" sz="2000" dirty="0">
+              <a:rPr lang="es-419" sz="2200" dirty="0">
                 <a:solidFill>
                   <a:srgbClr val="272525"/>
                 </a:solidFill>
@@ -9320,7 +9816,7 @@
               <a:buChar char="•"/>
             </a:pPr>
             <a:r>
-              <a:rPr lang="es-419" sz="2000" dirty="0">
+              <a:rPr lang="es-419" sz="2200" dirty="0">
                 <a:solidFill>
                   <a:srgbClr val="272525"/>
                 </a:solidFill>
@@ -9338,7 +9834,7 @@
               <a:buChar char="•"/>
             </a:pPr>
             <a:r>
-              <a:rPr lang="es-419" sz="2000" dirty="0">
+              <a:rPr lang="es-419" sz="2200" dirty="0">
                 <a:solidFill>
                   <a:srgbClr val="272525"/>
                 </a:solidFill>
@@ -9356,7 +9852,7 @@
               <a:buChar char="•"/>
             </a:pPr>
             <a:r>
-              <a:rPr lang="es-419" sz="2000" dirty="0">
+              <a:rPr lang="es-419" sz="2200" dirty="0">
                 <a:solidFill>
                   <a:srgbClr val="272525"/>
                 </a:solidFill>
@@ -9376,6 +9872,564 @@
 </file>
 
 <file path=ppt/slides/slide7.xml><?xml version="1.0" encoding="utf-8"?>
+<p:sld xmlns:a="http://schemas.openxmlformats.org/drawingml/2006/main" xmlns:r="http://schemas.openxmlformats.org/officeDocument/2006/relationships" xmlns:p="http://schemas.openxmlformats.org/presentationml/2006/main">
+  <p:cSld>
+    <p:spTree>
+      <p:nvGrpSpPr>
+        <p:cNvPr id="1" name="">
+          <a:extLst>
+            <a:ext uri="{FF2B5EF4-FFF2-40B4-BE49-F238E27FC236}">
+              <a16:creationId xmlns:a16="http://schemas.microsoft.com/office/drawing/2014/main" id="{34FCE8E6-49E3-2DB7-D863-E940F2A32963}"/>
+            </a:ext>
+          </a:extLst>
+        </p:cNvPr>
+        <p:cNvGrpSpPr/>
+        <p:nvPr/>
+      </p:nvGrpSpPr>
+      <p:grpSpPr>
+        <a:xfrm>
+          <a:off x="0" y="0"/>
+          <a:ext cx="0" cy="0"/>
+          <a:chOff x="0" y="0"/>
+          <a:chExt cx="0" cy="0"/>
+        </a:xfrm>
+      </p:grpSpPr>
+      <p:sp>
+        <p:nvSpPr>
+          <p:cNvPr id="2" name="Text 0">
+            <a:extLst>
+              <a:ext uri="{FF2B5EF4-FFF2-40B4-BE49-F238E27FC236}">
+                <a16:creationId xmlns:a16="http://schemas.microsoft.com/office/drawing/2014/main" id="{CBCA940F-65FD-232D-200C-1B0627DA9545}"/>
+              </a:ext>
+            </a:extLst>
+          </p:cNvPr>
+          <p:cNvSpPr/>
+          <p:nvPr/>
+        </p:nvSpPr>
+        <p:spPr>
+          <a:xfrm>
+            <a:off x="2347675" y="487620"/>
+            <a:ext cx="7053143" cy="563285"/>
+          </a:xfrm>
+          <a:prstGeom prst="rect">
+            <a:avLst/>
+          </a:prstGeom>
+          <a:noFill/>
+          <a:ln/>
+        </p:spPr>
+        <p:txBody>
+          <a:bodyPr wrap="none" lIns="0" tIns="0" rIns="0" bIns="0" rtlCol="0" anchor="t"/>
+          <a:lstStyle/>
+          <a:p>
+            <a:pPr marL="0" indent="0" algn="l">
+              <a:lnSpc>
+                <a:spcPts val="4400"/>
+              </a:lnSpc>
+              <a:buNone/>
+            </a:pPr>
+            <a:r>
+              <a:rPr lang="es-419" sz="3500" noProof="0" dirty="0">
+                <a:solidFill>
+                  <a:srgbClr val="D73AD7"/>
+                </a:solidFill>
+                <a:latin typeface="Source Serif 4 Semi Bold" pitchFamily="34" charset="0"/>
+                <a:ea typeface="Source Serif 4 Semi Bold" pitchFamily="34" charset="-122"/>
+                <a:cs typeface="Source Serif 4 Semi Bold" pitchFamily="34" charset="-120"/>
+              </a:rPr>
+              <a:t>Alcances técnicos</a:t>
+            </a:r>
+            <a:endParaRPr lang="es-419" sz="3500" noProof="0" dirty="0"/>
+          </a:p>
+        </p:txBody>
+      </p:sp>
+      <p:pic>
+        <p:nvPicPr>
+          <p:cNvPr id="6" name="Image 1" descr="preencoded.png">
+            <a:extLst>
+              <a:ext uri="{FF2B5EF4-FFF2-40B4-BE49-F238E27FC236}">
+                <a16:creationId xmlns:a16="http://schemas.microsoft.com/office/drawing/2014/main" id="{A59C7CCA-9ADB-6B19-0754-CBE24519FFAA}"/>
+              </a:ext>
+            </a:extLst>
+          </p:cNvPr>
+          <p:cNvPicPr>
+            <a:picLocks noChangeAspect="1"/>
+          </p:cNvPicPr>
+          <p:nvPr/>
+        </p:nvPicPr>
+        <p:blipFill>
+          <a:blip r:embed="rId3"/>
+          <a:stretch>
+            <a:fillRect/>
+          </a:stretch>
+        </p:blipFill>
+        <p:spPr>
+          <a:xfrm>
+            <a:off x="432672" y="1269237"/>
+            <a:ext cx="957501" cy="1148953"/>
+          </a:xfrm>
+          <a:prstGeom prst="rect">
+            <a:avLst/>
+          </a:prstGeom>
+        </p:spPr>
+      </p:pic>
+      <p:pic>
+        <p:nvPicPr>
+          <p:cNvPr id="9" name="Image 2" descr="preencoded.png">
+            <a:extLst>
+              <a:ext uri="{FF2B5EF4-FFF2-40B4-BE49-F238E27FC236}">
+                <a16:creationId xmlns:a16="http://schemas.microsoft.com/office/drawing/2014/main" id="{5739B4F8-2E98-CA9B-EAA0-68EB5AD60E22}"/>
+              </a:ext>
+            </a:extLst>
+          </p:cNvPr>
+          <p:cNvPicPr>
+            <a:picLocks noChangeAspect="1"/>
+          </p:cNvPicPr>
+          <p:nvPr/>
+        </p:nvPicPr>
+        <p:blipFill>
+          <a:blip r:embed="rId4"/>
+          <a:stretch>
+            <a:fillRect/>
+          </a:stretch>
+        </p:blipFill>
+        <p:spPr>
+          <a:xfrm>
+            <a:off x="432671" y="2527355"/>
+            <a:ext cx="957501" cy="1148953"/>
+          </a:xfrm>
+          <a:prstGeom prst="rect">
+            <a:avLst/>
+          </a:prstGeom>
+        </p:spPr>
+      </p:pic>
+      <p:pic>
+        <p:nvPicPr>
+          <p:cNvPr id="12" name="Image 3" descr="preencoded.png">
+            <a:extLst>
+              <a:ext uri="{FF2B5EF4-FFF2-40B4-BE49-F238E27FC236}">
+                <a16:creationId xmlns:a16="http://schemas.microsoft.com/office/drawing/2014/main" id="{78BCA749-04CD-CABA-7DE3-3163E6F24012}"/>
+              </a:ext>
+            </a:extLst>
+          </p:cNvPr>
+          <p:cNvPicPr>
+            <a:picLocks noChangeAspect="1"/>
+          </p:cNvPicPr>
+          <p:nvPr/>
+        </p:nvPicPr>
+        <p:blipFill>
+          <a:blip r:embed="rId5"/>
+          <a:stretch>
+            <a:fillRect/>
+          </a:stretch>
+        </p:blipFill>
+        <p:spPr>
+          <a:xfrm>
+            <a:off x="432673" y="3765929"/>
+            <a:ext cx="957501" cy="1148953"/>
+          </a:xfrm>
+          <a:prstGeom prst="rect">
+            <a:avLst/>
+          </a:prstGeom>
+        </p:spPr>
+      </p:pic>
+      <p:pic>
+        <p:nvPicPr>
+          <p:cNvPr id="15" name="Image 4" descr="preencoded.png">
+            <a:extLst>
+              <a:ext uri="{FF2B5EF4-FFF2-40B4-BE49-F238E27FC236}">
+                <a16:creationId xmlns:a16="http://schemas.microsoft.com/office/drawing/2014/main" id="{15B8E720-7A40-FD60-454E-13517CF78E34}"/>
+              </a:ext>
+            </a:extLst>
+          </p:cNvPr>
+          <p:cNvPicPr>
+            <a:picLocks noChangeAspect="1"/>
+          </p:cNvPicPr>
+          <p:nvPr/>
+        </p:nvPicPr>
+        <p:blipFill>
+          <a:blip r:embed="rId6"/>
+          <a:stretch>
+            <a:fillRect/>
+          </a:stretch>
+        </p:blipFill>
+        <p:spPr>
+          <a:xfrm>
+            <a:off x="432670" y="5024047"/>
+            <a:ext cx="957501" cy="1148953"/>
+          </a:xfrm>
+          <a:prstGeom prst="rect">
+            <a:avLst/>
+          </a:prstGeom>
+        </p:spPr>
+      </p:pic>
+      <p:sp>
+        <p:nvSpPr>
+          <p:cNvPr id="13" name="Rectangle 7">
+            <a:extLst>
+              <a:ext uri="{FF2B5EF4-FFF2-40B4-BE49-F238E27FC236}">
+                <a16:creationId xmlns:a16="http://schemas.microsoft.com/office/drawing/2014/main" id="{859FEDE6-D572-82BE-CDAF-4FF526AA7016}"/>
+              </a:ext>
+            </a:extLst>
+          </p:cNvPr>
+          <p:cNvSpPr>
+            <a:spLocks noChangeArrowheads="1"/>
+          </p:cNvSpPr>
+          <p:nvPr/>
+        </p:nvSpPr>
+        <p:spPr bwMode="auto">
+          <a:xfrm rot="10800000" flipV="1">
+            <a:off x="1828798" y="1392202"/>
+            <a:ext cx="10109201" cy="4747453"/>
+          </a:xfrm>
+          <a:prstGeom prst="rect">
+            <a:avLst/>
+          </a:prstGeom>
+          <a:noFill/>
+          <a:ln>
+            <a:noFill/>
+          </a:ln>
+          <a:effectLst/>
+          <a:extLst>
+            <a:ext uri="{909E8E84-426E-40DD-AFC4-6F175D3DCCD1}">
+              <a14:hiddenFill xmlns:a14="http://schemas.microsoft.com/office/drawing/2010/main">
+                <a:solidFill>
+                  <a:schemeClr val="accent1"/>
+                </a:solidFill>
+              </a14:hiddenFill>
+            </a:ext>
+            <a:ext uri="{91240B29-F687-4F45-9708-019B960494DF}">
+              <a14:hiddenLine xmlns:a14="http://schemas.microsoft.com/office/drawing/2010/main" w="9525">
+                <a:solidFill>
+                  <a:schemeClr val="tx1"/>
+                </a:solidFill>
+                <a:miter lim="800000"/>
+                <a:headEnd/>
+                <a:tailEnd/>
+              </a14:hiddenLine>
+            </a:ext>
+            <a:ext uri="{AF507438-7753-43E0-B8FC-AC1667EBCBE1}">
+              <a14:hiddenEffects xmlns:a14="http://schemas.microsoft.com/office/drawing/2010/main">
+                <a:effectLst>
+                  <a:outerShdw dist="35921" dir="2700000" algn="ctr" rotWithShape="0">
+                    <a:schemeClr val="bg2"/>
+                  </a:outerShdw>
+                </a:effectLst>
+              </a14:hiddenEffects>
+            </a:ext>
+          </a:extLst>
+        </p:spPr>
+        <p:txBody>
+          <a:bodyPr vert="horz" wrap="square" lIns="91440" tIns="45720" rIns="91440" bIns="45720" numCol="1" anchor="ctr" anchorCtr="0" compatLnSpc="1">
+            <a:prstTxWarp prst="textNoShape">
+              <a:avLst/>
+            </a:prstTxWarp>
+            <a:spAutoFit/>
+          </a:bodyPr>
+          <a:lstStyle/>
+          <a:p>
+            <a:pPr marL="0" marR="0" lvl="0" indent="0" algn="l" defTabSz="914400" rtl="0" eaLnBrk="0" fontAlgn="base" latinLnBrk="0" hangingPunct="0">
+              <a:lnSpc>
+                <a:spcPct val="200000"/>
+              </a:lnSpc>
+              <a:spcBef>
+                <a:spcPct val="0"/>
+              </a:spcBef>
+              <a:spcAft>
+                <a:spcPct val="0"/>
+              </a:spcAft>
+              <a:buClrTx/>
+              <a:buSzTx/>
+              <a:buFontTx/>
+              <a:buChar char="•"/>
+              <a:tabLst/>
+            </a:pPr>
+            <a:r>
+              <a:rPr lang="es-419" altLang="es-419" sz="2200" dirty="0">
+                <a:solidFill>
+                  <a:srgbClr val="272525"/>
+                </a:solidFill>
+                <a:latin typeface="Source Sans 3" pitchFamily="34" charset="0"/>
+              </a:rPr>
+              <a:t>Aplicación web de agendamiento y </a:t>
+            </a:r>
+            <a:r>
+              <a:rPr lang="es-419" altLang="es-419" sz="2200" dirty="0" err="1">
+                <a:solidFill>
+                  <a:srgbClr val="272525"/>
+                </a:solidFill>
+                <a:latin typeface="Source Sans 3" pitchFamily="34" charset="0"/>
+              </a:rPr>
+              <a:t>triage</a:t>
+            </a:r>
+            <a:r>
+              <a:rPr lang="es-419" altLang="es-419" sz="2200" dirty="0">
+                <a:solidFill>
+                  <a:srgbClr val="272525"/>
+                </a:solidFill>
+                <a:latin typeface="Source Sans 3" pitchFamily="34" charset="0"/>
+              </a:rPr>
+              <a:t> orientativo.</a:t>
+            </a:r>
+          </a:p>
+          <a:p>
+            <a:pPr marL="0" marR="0" lvl="0" indent="0" algn="l" defTabSz="914400" rtl="0" eaLnBrk="0" fontAlgn="base" latinLnBrk="0" hangingPunct="0">
+              <a:lnSpc>
+                <a:spcPct val="200000"/>
+              </a:lnSpc>
+              <a:spcBef>
+                <a:spcPct val="0"/>
+              </a:spcBef>
+              <a:spcAft>
+                <a:spcPct val="0"/>
+              </a:spcAft>
+              <a:buClrTx/>
+              <a:buSzTx/>
+              <a:buFontTx/>
+              <a:buChar char="•"/>
+              <a:tabLst/>
+            </a:pPr>
+            <a:r>
+              <a:rPr lang="es-419" altLang="es-419" sz="2200" dirty="0" err="1">
+                <a:solidFill>
+                  <a:srgbClr val="272525"/>
+                </a:solidFill>
+                <a:latin typeface="Source Sans 3" pitchFamily="34" charset="0"/>
+              </a:rPr>
+              <a:t>Backend</a:t>
+            </a:r>
+            <a:r>
+              <a:rPr lang="es-419" altLang="es-419" sz="2200" dirty="0">
+                <a:solidFill>
+                  <a:srgbClr val="272525"/>
+                </a:solidFill>
+                <a:latin typeface="Source Sans 3" pitchFamily="34" charset="0"/>
+              </a:rPr>
+              <a:t> en .NET 8 (C#) con API REST y </a:t>
+            </a:r>
+            <a:r>
+              <a:rPr lang="es-419" altLang="es-419" sz="2200" dirty="0" err="1">
+                <a:solidFill>
+                  <a:srgbClr val="272525"/>
+                </a:solidFill>
+                <a:latin typeface="Source Sans 3" pitchFamily="34" charset="0"/>
+              </a:rPr>
+              <a:t>Entity</a:t>
+            </a:r>
+            <a:r>
+              <a:rPr lang="es-419" altLang="es-419" sz="2200" dirty="0">
+                <a:solidFill>
+                  <a:srgbClr val="272525"/>
+                </a:solidFill>
+                <a:latin typeface="Source Sans 3" pitchFamily="34" charset="0"/>
+              </a:rPr>
+              <a:t> Framework Core.</a:t>
+            </a:r>
+          </a:p>
+          <a:p>
+            <a:pPr marL="0" marR="0" lvl="0" indent="0" algn="l" defTabSz="914400" rtl="0" eaLnBrk="0" fontAlgn="base" latinLnBrk="0" hangingPunct="0">
+              <a:lnSpc>
+                <a:spcPct val="200000"/>
+              </a:lnSpc>
+              <a:spcBef>
+                <a:spcPct val="0"/>
+              </a:spcBef>
+              <a:spcAft>
+                <a:spcPct val="0"/>
+              </a:spcAft>
+              <a:buClrTx/>
+              <a:buSzTx/>
+              <a:buFontTx/>
+              <a:buChar char="•"/>
+              <a:tabLst/>
+            </a:pPr>
+            <a:r>
+              <a:rPr lang="es-419" altLang="es-419" sz="2200" dirty="0">
+                <a:solidFill>
+                  <a:srgbClr val="272525"/>
+                </a:solidFill>
+                <a:latin typeface="Source Sans 3" pitchFamily="34" charset="0"/>
+              </a:rPr>
+              <a:t>Frontend en </a:t>
+            </a:r>
+            <a:r>
+              <a:rPr lang="es-419" altLang="es-419" sz="2200" dirty="0" err="1">
+                <a:solidFill>
+                  <a:srgbClr val="272525"/>
+                </a:solidFill>
+                <a:latin typeface="Source Sans 3" pitchFamily="34" charset="0"/>
+              </a:rPr>
+              <a:t>React</a:t>
+            </a:r>
+            <a:r>
+              <a:rPr lang="es-419" altLang="es-419" sz="2200" dirty="0">
+                <a:solidFill>
+                  <a:srgbClr val="272525"/>
+                </a:solidFill>
+                <a:latin typeface="Source Sans 3" pitchFamily="34" charset="0"/>
+              </a:rPr>
+              <a:t> + Vite + </a:t>
+            </a:r>
+            <a:r>
+              <a:rPr lang="es-419" altLang="es-419" sz="2200" dirty="0" err="1">
+                <a:solidFill>
+                  <a:srgbClr val="272525"/>
+                </a:solidFill>
+                <a:latin typeface="Source Sans 3" pitchFamily="34" charset="0"/>
+              </a:rPr>
+              <a:t>TypeScript</a:t>
+            </a:r>
+            <a:r>
+              <a:rPr lang="es-419" altLang="es-419" sz="2200" dirty="0">
+                <a:solidFill>
+                  <a:srgbClr val="272525"/>
+                </a:solidFill>
+                <a:latin typeface="Source Sans 3" pitchFamily="34" charset="0"/>
+              </a:rPr>
+              <a:t>, interfaz responsive.</a:t>
+            </a:r>
+          </a:p>
+          <a:p>
+            <a:pPr marL="0" marR="0" lvl="0" indent="0" algn="l" defTabSz="914400" rtl="0" eaLnBrk="0" fontAlgn="base" latinLnBrk="0" hangingPunct="0">
+              <a:lnSpc>
+                <a:spcPct val="200000"/>
+              </a:lnSpc>
+              <a:spcBef>
+                <a:spcPct val="0"/>
+              </a:spcBef>
+              <a:spcAft>
+                <a:spcPct val="0"/>
+              </a:spcAft>
+              <a:buClrTx/>
+              <a:buSzTx/>
+              <a:buFontTx/>
+              <a:buChar char="•"/>
+              <a:tabLst/>
+            </a:pPr>
+            <a:r>
+              <a:rPr lang="es-419" altLang="es-419" sz="2200" dirty="0">
+                <a:solidFill>
+                  <a:srgbClr val="272525"/>
+                </a:solidFill>
+                <a:latin typeface="Source Sans 3" pitchFamily="34" charset="0"/>
+              </a:rPr>
+              <a:t>Base de datos SQL Server con tablas de pacientes, médicos, sucursales y citas.</a:t>
+            </a:r>
+          </a:p>
+          <a:p>
+            <a:pPr marL="0" marR="0" lvl="0" indent="0" algn="l" defTabSz="914400" rtl="0" eaLnBrk="0" fontAlgn="base" latinLnBrk="0" hangingPunct="0">
+              <a:lnSpc>
+                <a:spcPct val="200000"/>
+              </a:lnSpc>
+              <a:spcBef>
+                <a:spcPct val="0"/>
+              </a:spcBef>
+              <a:spcAft>
+                <a:spcPct val="0"/>
+              </a:spcAft>
+              <a:buClrTx/>
+              <a:buSzTx/>
+              <a:buFontTx/>
+              <a:buChar char="•"/>
+              <a:tabLst/>
+            </a:pPr>
+            <a:r>
+              <a:rPr lang="es-419" altLang="es-419" sz="2200" dirty="0">
+                <a:solidFill>
+                  <a:srgbClr val="272525"/>
+                </a:solidFill>
+                <a:latin typeface="Source Sans 3" pitchFamily="34" charset="0"/>
+              </a:rPr>
+              <a:t>Autenticación con JWT y manejo de roles (Paciente, Médico, Administrador).</a:t>
+            </a:r>
+          </a:p>
+          <a:p>
+            <a:pPr marL="0" marR="0" lvl="0" indent="0" algn="l" defTabSz="914400" rtl="0" eaLnBrk="0" fontAlgn="base" latinLnBrk="0" hangingPunct="0">
+              <a:lnSpc>
+                <a:spcPct val="200000"/>
+              </a:lnSpc>
+              <a:spcBef>
+                <a:spcPct val="0"/>
+              </a:spcBef>
+              <a:spcAft>
+                <a:spcPct val="0"/>
+              </a:spcAft>
+              <a:buClrTx/>
+              <a:buSzTx/>
+              <a:buFontTx/>
+              <a:buChar char="•"/>
+              <a:tabLst/>
+            </a:pPr>
+            <a:r>
+              <a:rPr lang="es-419" altLang="es-419" sz="2200" dirty="0">
+                <a:solidFill>
+                  <a:srgbClr val="272525"/>
+                </a:solidFill>
+                <a:latin typeface="Source Sans 3" pitchFamily="34" charset="0"/>
+              </a:rPr>
+              <a:t>Gestión de agenda: crear, reagendar y cancelar citas médicas.</a:t>
+            </a:r>
+          </a:p>
+          <a:p>
+            <a:pPr marL="0" marR="0" lvl="0" indent="0" algn="l" defTabSz="914400" rtl="0" eaLnBrk="0" fontAlgn="base" latinLnBrk="0" hangingPunct="0">
+              <a:lnSpc>
+                <a:spcPct val="200000"/>
+              </a:lnSpc>
+              <a:spcBef>
+                <a:spcPct val="0"/>
+              </a:spcBef>
+              <a:spcAft>
+                <a:spcPct val="0"/>
+              </a:spcAft>
+              <a:buClrTx/>
+              <a:buSzTx/>
+              <a:buFontTx/>
+              <a:buChar char="•"/>
+              <a:tabLst/>
+            </a:pPr>
+            <a:r>
+              <a:rPr lang="es-419" altLang="es-419" sz="2200" dirty="0">
+                <a:solidFill>
+                  <a:srgbClr val="272525"/>
+                </a:solidFill>
+                <a:latin typeface="Source Sans 3" pitchFamily="34" charset="0"/>
+              </a:rPr>
+              <a:t>Flujo de </a:t>
+            </a:r>
+            <a:r>
+              <a:rPr lang="es-419" altLang="es-419" sz="2200" dirty="0" err="1">
+                <a:solidFill>
+                  <a:srgbClr val="272525"/>
+                </a:solidFill>
+                <a:latin typeface="Source Sans 3" pitchFamily="34" charset="0"/>
+              </a:rPr>
+              <a:t>triage</a:t>
+            </a:r>
+            <a:r>
+              <a:rPr lang="es-419" altLang="es-419" sz="2200" dirty="0">
+                <a:solidFill>
+                  <a:srgbClr val="272525"/>
+                </a:solidFill>
+                <a:latin typeface="Source Sans 3" pitchFamily="34" charset="0"/>
+              </a:rPr>
+              <a:t> con cuestionario de síntomas y sugerencia de especialidad.</a:t>
+            </a:r>
+          </a:p>
+        </p:txBody>
+      </p:sp>
+    </p:spTree>
+    <p:extLst>
+      <p:ext uri="{BB962C8B-B14F-4D97-AF65-F5344CB8AC3E}">
+        <p14:creationId xmlns:p14="http://schemas.microsoft.com/office/powerpoint/2010/main" val="1961350853"/>
+      </p:ext>
+    </p:extLst>
+  </p:cSld>
+  <p:clrMapOvr>
+    <a:masterClrMapping/>
+  </p:clrMapOvr>
+</p:sld>
+</file>
+
+<file path=ppt/slides/slide8.xml><?xml version="1.0" encoding="utf-8"?>
 <p:sld xmlns:a="http://schemas.openxmlformats.org/drawingml/2006/main" xmlns:r="http://schemas.openxmlformats.org/officeDocument/2006/relationships" xmlns:p="http://schemas.openxmlformats.org/presentationml/2006/main">
   <p:cSld name="Slide 6">
     <p:spTree>
@@ -9836,7 +10890,7 @@
 </p:sld>
 </file>
 
-<file path=ppt/slides/slide8.xml><?xml version="1.0" encoding="utf-8"?>
+<file path=ppt/slides/slide9.xml><?xml version="1.0" encoding="utf-8"?>
 <p:sld xmlns:a="http://schemas.openxmlformats.org/drawingml/2006/main" xmlns:r="http://schemas.openxmlformats.org/officeDocument/2006/relationships" xmlns:p="http://schemas.openxmlformats.org/presentationml/2006/main">
   <p:cSld name="Slide 7">
     <p:spTree>
@@ -11055,386 +12109,6 @@
 </p:sld>
 </file>
 
-<file path=ppt/slides/slide9.xml><?xml version="1.0" encoding="utf-8"?>
-<p:sld xmlns:a="http://schemas.openxmlformats.org/drawingml/2006/main" xmlns:r="http://schemas.openxmlformats.org/officeDocument/2006/relationships" xmlns:p="http://schemas.openxmlformats.org/presentationml/2006/main">
-  <p:cSld name="Slide 9">
-    <p:spTree>
-      <p:nvGrpSpPr>
-        <p:cNvPr id="1" name=""/>
-        <p:cNvGrpSpPr/>
-        <p:nvPr/>
-      </p:nvGrpSpPr>
-      <p:grpSpPr>
-        <a:xfrm>
-          <a:off x="0" y="0"/>
-          <a:ext cx="0" cy="0"/>
-          <a:chOff x="0" y="0"/>
-          <a:chExt cx="0" cy="0"/>
-        </a:xfrm>
-      </p:grpSpPr>
-      <p:pic>
-        <p:nvPicPr>
-          <p:cNvPr id="2" name="Image 0" descr="preencoded.png"/>
-          <p:cNvPicPr>
-            <a:picLocks noChangeAspect="1"/>
-          </p:cNvPicPr>
-          <p:nvPr/>
-        </p:nvPicPr>
-        <p:blipFill>
-          <a:blip r:embed="rId3"/>
-          <a:stretch>
-            <a:fillRect/>
-          </a:stretch>
-        </p:blipFill>
-        <p:spPr>
-          <a:xfrm>
-            <a:off x="0" y="0"/>
-            <a:ext cx="5486400" cy="8229600"/>
-          </a:xfrm>
-          <a:prstGeom prst="rect">
-            <a:avLst/>
-          </a:prstGeom>
-        </p:spPr>
-      </p:pic>
-      <p:sp>
-        <p:nvSpPr>
-          <p:cNvPr id="3" name="Text 0"/>
-          <p:cNvSpPr/>
-          <p:nvPr/>
-        </p:nvSpPr>
-        <p:spPr>
-          <a:xfrm>
-            <a:off x="6324124" y="723900"/>
-            <a:ext cx="7468553" cy="1408033"/>
-          </a:xfrm>
-          <a:prstGeom prst="rect">
-            <a:avLst/>
-          </a:prstGeom>
-          <a:noFill/>
-          <a:ln/>
-        </p:spPr>
-        <p:txBody>
-          <a:bodyPr wrap="square" lIns="0" tIns="0" rIns="0" bIns="0" rtlCol="0" anchor="t"/>
-          <a:lstStyle/>
-          <a:p>
-            <a:pPr marL="0" indent="0" algn="l">
-              <a:lnSpc>
-                <a:spcPts val="5500"/>
-              </a:lnSpc>
-              <a:buNone/>
-            </a:pPr>
-            <a:r>
-              <a:rPr lang="es-419" sz="4400" noProof="0" dirty="0">
-                <a:solidFill>
-                  <a:srgbClr val="D73AD7"/>
-                </a:solidFill>
-                <a:latin typeface="Source Serif 4 Semi Bold" pitchFamily="34" charset="0"/>
-                <a:ea typeface="Source Serif 4 Semi Bold" pitchFamily="34" charset="-122"/>
-                <a:cs typeface="Source Serif 4 Semi Bold" pitchFamily="34" charset="-120"/>
-              </a:rPr>
-              <a:t>Tecnologías que Impulsan MediTriage</a:t>
-            </a:r>
-            <a:endParaRPr lang="es-419" sz="4400" noProof="0" dirty="0"/>
-          </a:p>
-        </p:txBody>
-      </p:sp>
-      <p:sp>
-        <p:nvSpPr>
-          <p:cNvPr id="4" name="Text 1"/>
-          <p:cNvSpPr/>
-          <p:nvPr/>
-        </p:nvSpPr>
-        <p:spPr>
-          <a:xfrm>
-            <a:off x="5866924" y="2107883"/>
-            <a:ext cx="8463673" cy="5132366"/>
-          </a:xfrm>
-          <a:prstGeom prst="rect">
-            <a:avLst/>
-          </a:prstGeom>
-          <a:noFill/>
-          <a:ln/>
-        </p:spPr>
-        <p:txBody>
-          <a:bodyPr wrap="square" lIns="0" tIns="0" rIns="0" bIns="0" rtlCol="0" anchor="t"/>
-          <a:lstStyle/>
-          <a:p>
-            <a:pPr marL="342900" indent="-342900" algn="l">
-              <a:lnSpc>
-                <a:spcPct val="200000"/>
-              </a:lnSpc>
-              <a:buSzPct val="100000"/>
-              <a:buFont typeface="Arial" panose="020B0604020202020204" pitchFamily="34" charset="0"/>
-              <a:buChar char="•"/>
-            </a:pPr>
-            <a:r>
-              <a:rPr lang="es-419" sz="2400" noProof="0" dirty="0" err="1">
-                <a:solidFill>
-                  <a:srgbClr val="272525"/>
-                </a:solidFill>
-                <a:latin typeface="Source Sans 3" pitchFamily="34" charset="0"/>
-                <a:ea typeface="Source Sans 3" pitchFamily="34" charset="-122"/>
-                <a:cs typeface="Source Sans 3" pitchFamily="34" charset="-120"/>
-              </a:rPr>
-              <a:t>Backend</a:t>
-            </a:r>
-            <a:r>
-              <a:rPr lang="es-419" sz="2400" noProof="0" dirty="0">
-                <a:solidFill>
-                  <a:srgbClr val="272525"/>
-                </a:solidFill>
-                <a:latin typeface="Source Sans 3" pitchFamily="34" charset="0"/>
-                <a:ea typeface="Source Sans 3" pitchFamily="34" charset="-122"/>
-                <a:cs typeface="Source Sans 3" pitchFamily="34" charset="-120"/>
-              </a:rPr>
-              <a:t>: .NET 8 Web API (C#), </a:t>
-            </a:r>
-            <a:r>
-              <a:rPr lang="es-419" sz="2400" noProof="0" dirty="0" err="1">
-                <a:solidFill>
-                  <a:srgbClr val="272525"/>
-                </a:solidFill>
-                <a:latin typeface="Source Sans 3" pitchFamily="34" charset="0"/>
-                <a:ea typeface="Source Sans 3" pitchFamily="34" charset="-122"/>
-                <a:cs typeface="Source Sans 3" pitchFamily="34" charset="-120"/>
-              </a:rPr>
-              <a:t>Entity</a:t>
-            </a:r>
-            <a:r>
-              <a:rPr lang="es-419" sz="2400" noProof="0" dirty="0">
-                <a:solidFill>
-                  <a:srgbClr val="272525"/>
-                </a:solidFill>
-                <a:latin typeface="Source Sans 3" pitchFamily="34" charset="0"/>
-                <a:ea typeface="Source Sans 3" pitchFamily="34" charset="-122"/>
-                <a:cs typeface="Source Sans 3" pitchFamily="34" charset="-120"/>
-              </a:rPr>
-              <a:t> Framework Core, SQL Server</a:t>
-            </a:r>
-          </a:p>
-          <a:p>
-            <a:pPr marL="342900" indent="-342900" algn="l">
-              <a:lnSpc>
-                <a:spcPct val="200000"/>
-              </a:lnSpc>
-              <a:buSzPct val="100000"/>
-              <a:buFont typeface="Arial" panose="020B0604020202020204" pitchFamily="34" charset="0"/>
-              <a:buChar char="•"/>
-            </a:pPr>
-            <a:r>
-              <a:rPr lang="es-419" sz="2400" noProof="0" dirty="0" err="1">
-                <a:solidFill>
-                  <a:srgbClr val="272525"/>
-                </a:solidFill>
-                <a:latin typeface="Source Sans 3" pitchFamily="34" charset="0"/>
-                <a:ea typeface="Source Sans 3" pitchFamily="34" charset="-122"/>
-                <a:cs typeface="Source Sans 3" pitchFamily="34" charset="-120"/>
-              </a:rPr>
-              <a:t>Frontend</a:t>
-            </a:r>
-            <a:r>
-              <a:rPr lang="es-419" sz="2400" noProof="0" dirty="0">
-                <a:solidFill>
-                  <a:srgbClr val="272525"/>
-                </a:solidFill>
-                <a:latin typeface="Source Sans 3" pitchFamily="34" charset="0"/>
-                <a:ea typeface="Source Sans 3" pitchFamily="34" charset="-122"/>
-                <a:cs typeface="Source Sans 3" pitchFamily="34" charset="-120"/>
-              </a:rPr>
-              <a:t>: </a:t>
-            </a:r>
-            <a:r>
-              <a:rPr lang="es-419" sz="2400" noProof="0" dirty="0" err="1">
-                <a:solidFill>
-                  <a:srgbClr val="272525"/>
-                </a:solidFill>
-                <a:latin typeface="Source Sans 3" pitchFamily="34" charset="0"/>
-                <a:ea typeface="Source Sans 3" pitchFamily="34" charset="-122"/>
-                <a:cs typeface="Source Sans 3" pitchFamily="34" charset="-120"/>
-              </a:rPr>
-              <a:t>React</a:t>
-            </a:r>
-            <a:r>
-              <a:rPr lang="es-419" sz="2400" noProof="0" dirty="0">
-                <a:solidFill>
-                  <a:srgbClr val="272525"/>
-                </a:solidFill>
-                <a:latin typeface="Source Sans 3" pitchFamily="34" charset="0"/>
-                <a:ea typeface="Source Sans 3" pitchFamily="34" charset="-122"/>
-                <a:cs typeface="Source Sans 3" pitchFamily="34" charset="-120"/>
-              </a:rPr>
-              <a:t> + Vite + </a:t>
-            </a:r>
-            <a:r>
-              <a:rPr lang="es-419" sz="2400" noProof="0" dirty="0" err="1">
-                <a:solidFill>
-                  <a:srgbClr val="272525"/>
-                </a:solidFill>
-                <a:latin typeface="Source Sans 3" pitchFamily="34" charset="0"/>
-                <a:ea typeface="Source Sans 3" pitchFamily="34" charset="-122"/>
-                <a:cs typeface="Source Sans 3" pitchFamily="34" charset="-120"/>
-              </a:rPr>
-              <a:t>TypeScript</a:t>
-            </a:r>
-            <a:r>
-              <a:rPr lang="es-419" sz="2400" noProof="0" dirty="0">
-                <a:solidFill>
-                  <a:srgbClr val="272525"/>
-                </a:solidFill>
-                <a:latin typeface="Source Sans 3" pitchFamily="34" charset="0"/>
-                <a:ea typeface="Source Sans 3" pitchFamily="34" charset="-122"/>
-                <a:cs typeface="Source Sans 3" pitchFamily="34" charset="-120"/>
-              </a:rPr>
-              <a:t> + </a:t>
-            </a:r>
-            <a:r>
-              <a:rPr lang="es-419" sz="2400" noProof="0" dirty="0" err="1">
-                <a:solidFill>
-                  <a:srgbClr val="272525"/>
-                </a:solidFill>
-                <a:latin typeface="Source Sans 3" pitchFamily="34" charset="0"/>
-                <a:ea typeface="Source Sans 3" pitchFamily="34" charset="-122"/>
-                <a:cs typeface="Source Sans 3" pitchFamily="34" charset="-120"/>
-              </a:rPr>
-              <a:t>Tailwind</a:t>
-            </a:r>
-            <a:r>
-              <a:rPr lang="es-419" sz="2400" noProof="0" dirty="0">
-                <a:solidFill>
-                  <a:srgbClr val="272525"/>
-                </a:solidFill>
-                <a:latin typeface="Source Sans 3" pitchFamily="34" charset="0"/>
-                <a:ea typeface="Source Sans 3" pitchFamily="34" charset="-122"/>
-                <a:cs typeface="Source Sans 3" pitchFamily="34" charset="-120"/>
-              </a:rPr>
-              <a:t> CSS</a:t>
-            </a:r>
-          </a:p>
-          <a:p>
-            <a:pPr marL="342900" indent="-342900" algn="l">
-              <a:lnSpc>
-                <a:spcPct val="200000"/>
-              </a:lnSpc>
-              <a:buSzPct val="100000"/>
-              <a:buFont typeface="Arial" panose="020B0604020202020204" pitchFamily="34" charset="0"/>
-              <a:buChar char="•"/>
-            </a:pPr>
-            <a:r>
-              <a:rPr lang="es-419" sz="2400" noProof="0" dirty="0">
-                <a:solidFill>
-                  <a:srgbClr val="272525"/>
-                </a:solidFill>
-                <a:latin typeface="Source Sans 3" pitchFamily="34" charset="0"/>
-                <a:ea typeface="Source Sans 3" pitchFamily="34" charset="-122"/>
-                <a:cs typeface="Source Sans 3" pitchFamily="34" charset="-120"/>
-              </a:rPr>
-              <a:t>IA: </a:t>
-            </a:r>
-            <a:r>
-              <a:rPr lang="es-419" sz="2400" noProof="0" dirty="0" err="1">
-                <a:solidFill>
-                  <a:srgbClr val="272525"/>
-                </a:solidFill>
-                <a:latin typeface="Source Sans 3" pitchFamily="34" charset="0"/>
-                <a:ea typeface="Source Sans 3" pitchFamily="34" charset="-122"/>
-                <a:cs typeface="Source Sans 3" pitchFamily="34" charset="-120"/>
-              </a:rPr>
-              <a:t>OpenAI</a:t>
-            </a:r>
-            <a:r>
-              <a:rPr lang="es-419" sz="2400" noProof="0" dirty="0">
-                <a:solidFill>
-                  <a:srgbClr val="272525"/>
-                </a:solidFill>
-                <a:latin typeface="Source Sans 3" pitchFamily="34" charset="0"/>
-                <a:ea typeface="Source Sans 3" pitchFamily="34" charset="-122"/>
-                <a:cs typeface="Source Sans 3" pitchFamily="34" charset="-120"/>
-              </a:rPr>
-              <a:t> API (modelo GPT‑4o o GPT‑5, a definir en configuración)</a:t>
-            </a:r>
-          </a:p>
-          <a:p>
-            <a:pPr marL="342900" indent="-342900" algn="l">
-              <a:lnSpc>
-                <a:spcPct val="200000"/>
-              </a:lnSpc>
-              <a:buSzPct val="100000"/>
-              <a:buFont typeface="Arial" panose="020B0604020202020204" pitchFamily="34" charset="0"/>
-              <a:buChar char="•"/>
-            </a:pPr>
-            <a:r>
-              <a:rPr lang="es-419" sz="2400" noProof="0" dirty="0">
-                <a:solidFill>
-                  <a:srgbClr val="272525"/>
-                </a:solidFill>
-                <a:latin typeface="Source Sans 3" pitchFamily="34" charset="0"/>
-                <a:ea typeface="Source Sans 3" pitchFamily="34" charset="-122"/>
-                <a:cs typeface="Source Sans 3" pitchFamily="34" charset="-120"/>
-              </a:rPr>
-              <a:t> Autenticación: JWT con roles (Paciente, Médico, Administrador)</a:t>
-            </a:r>
-          </a:p>
-          <a:p>
-            <a:pPr marL="342900" indent="-342900" algn="l">
-              <a:lnSpc>
-                <a:spcPct val="200000"/>
-              </a:lnSpc>
-              <a:buSzPct val="100000"/>
-              <a:buFont typeface="Arial" panose="020B0604020202020204" pitchFamily="34" charset="0"/>
-              <a:buChar char="•"/>
-            </a:pPr>
-            <a:r>
-              <a:rPr lang="es-419" sz="2400" noProof="0" dirty="0" err="1">
-                <a:solidFill>
-                  <a:srgbClr val="272525"/>
-                </a:solidFill>
-                <a:latin typeface="Source Sans 3" pitchFamily="34" charset="0"/>
-                <a:ea typeface="Source Sans 3" pitchFamily="34" charset="-122"/>
-                <a:cs typeface="Source Sans 3" pitchFamily="34" charset="-120"/>
-              </a:rPr>
-              <a:t>Observabilidad</a:t>
-            </a:r>
-            <a:r>
-              <a:rPr lang="es-419" sz="2400" noProof="0" dirty="0">
-                <a:solidFill>
-                  <a:srgbClr val="272525"/>
-                </a:solidFill>
-                <a:latin typeface="Source Sans 3" pitchFamily="34" charset="0"/>
-                <a:ea typeface="Source Sans 3" pitchFamily="34" charset="-122"/>
-                <a:cs typeface="Source Sans 3" pitchFamily="34" charset="-120"/>
-              </a:rPr>
-              <a:t>: logs estructurados y métricas básicas</a:t>
-            </a:r>
-            <a:r>
-              <a:rPr lang="es-419" sz="2400" dirty="0">
-                <a:solidFill>
-                  <a:srgbClr val="272525"/>
-                </a:solidFill>
-                <a:latin typeface="Source Sans 3" pitchFamily="34" charset="0"/>
-                <a:ea typeface="Source Sans 3" pitchFamily="34" charset="-122"/>
-                <a:cs typeface="Source Sans 3" pitchFamily="34" charset="-120"/>
-              </a:rPr>
-              <a:t>.</a:t>
-            </a:r>
-            <a:endParaRPr lang="es-419" sz="2400" noProof="0" dirty="0">
-              <a:solidFill>
-                <a:srgbClr val="272525"/>
-              </a:solidFill>
-              <a:latin typeface="Source Sans 3" pitchFamily="34" charset="0"/>
-              <a:ea typeface="Source Sans 3" pitchFamily="34" charset="-122"/>
-              <a:cs typeface="Source Sans 3" pitchFamily="34" charset="-120"/>
-            </a:endParaRPr>
-          </a:p>
-        </p:txBody>
-      </p:sp>
-    </p:spTree>
-  </p:cSld>
-  <p:clrMapOvr>
-    <a:masterClrMapping/>
-  </p:clrMapOvr>
-</p:sld>
-</file>
-
 <file path=ppt/theme/theme1.xml><?xml version="1.0" encoding="utf-8"?>
 <a:theme xmlns:a="http://schemas.openxmlformats.org/drawingml/2006/main" name="Galería">
   <a:themeElements>
